--- a/ДП/Презентация/Презентация.pptx
+++ b/ДП/Презентация/Презентация.pptx
@@ -5,19 +5,18 @@
     <p:sldMasterId id="2147483648" r:id="rId1"/>
   </p:sldMasterIdLst>
   <p:notesMasterIdLst>
-    <p:notesMasterId r:id="rId12"/>
+    <p:notesMasterId r:id="rId11"/>
   </p:notesMasterIdLst>
   <p:sldIdLst>
     <p:sldId id="267" r:id="rId2"/>
-    <p:sldId id="258" r:id="rId3"/>
-    <p:sldId id="260" r:id="rId4"/>
-    <p:sldId id="261" r:id="rId5"/>
-    <p:sldId id="262" r:id="rId6"/>
-    <p:sldId id="269" r:id="rId7"/>
-    <p:sldId id="263" r:id="rId8"/>
-    <p:sldId id="264" r:id="rId9"/>
-    <p:sldId id="265" r:id="rId10"/>
-    <p:sldId id="268" r:id="rId11"/>
+    <p:sldId id="260" r:id="rId3"/>
+    <p:sldId id="261" r:id="rId4"/>
+    <p:sldId id="262" r:id="rId5"/>
+    <p:sldId id="269" r:id="rId6"/>
+    <p:sldId id="263" r:id="rId7"/>
+    <p:sldId id="264" r:id="rId8"/>
+    <p:sldId id="265" r:id="rId9"/>
+    <p:sldId id="270" r:id="rId10"/>
   </p:sldIdLst>
   <p:sldSz cx="12192000" cy="6858000"/>
   <p:notesSz cx="6858000" cy="9144000"/>
@@ -568,7 +567,13 @@
   <p:cSld>
     <p:spTree>
       <p:nvGrpSpPr>
-        <p:cNvPr id="1" name=""/>
+        <p:cNvPr id="1" name="">
+          <a:extLst>
+            <a:ext uri="{FF2B5EF4-FFF2-40B4-BE49-F238E27FC236}">
+              <a16:creationId xmlns:a16="http://schemas.microsoft.com/office/drawing/2014/main" id="{74DC0C57-2EE8-B831-0B8D-056DB7A90BED}"/>
+            </a:ext>
+          </a:extLst>
+        </p:cNvPr>
         <p:cNvGrpSpPr/>
         <p:nvPr/>
       </p:nvGrpSpPr>
@@ -582,7 +587,13 @@
       </p:grpSpPr>
       <p:sp>
         <p:nvSpPr>
-          <p:cNvPr id="2" name="Образ слайда 1"/>
+          <p:cNvPr id="2" name="Образ слайда 1">
+            <a:extLst>
+              <a:ext uri="{FF2B5EF4-FFF2-40B4-BE49-F238E27FC236}">
+                <a16:creationId xmlns:a16="http://schemas.microsoft.com/office/drawing/2014/main" id="{65A1B50E-FF6B-ADD7-EC26-77E74F48868D}"/>
+              </a:ext>
+            </a:extLst>
+          </p:cNvPr>
           <p:cNvSpPr>
             <a:spLocks noGrp="1" noRot="1" noChangeAspect="1"/>
           </p:cNvSpPr>
@@ -594,7 +605,13 @@
       </p:sp>
       <p:sp>
         <p:nvSpPr>
-          <p:cNvPr id="3" name="Заметки 2"/>
+          <p:cNvPr id="3" name="Заметки 2">
+            <a:extLst>
+              <a:ext uri="{FF2B5EF4-FFF2-40B4-BE49-F238E27FC236}">
+                <a16:creationId xmlns:a16="http://schemas.microsoft.com/office/drawing/2014/main" id="{C4A95348-9ABA-DE3E-6021-FACDEC5339BE}"/>
+              </a:ext>
+            </a:extLst>
+          </p:cNvPr>
           <p:cNvSpPr>
             <a:spLocks noGrp="1"/>
           </p:cNvSpPr>
@@ -613,7 +630,13 @@
       </p:sp>
       <p:sp>
         <p:nvSpPr>
-          <p:cNvPr id="4" name="Номер слайда 3"/>
+          <p:cNvPr id="4" name="Номер слайда 3">
+            <a:extLst>
+              <a:ext uri="{FF2B5EF4-FFF2-40B4-BE49-F238E27FC236}">
+                <a16:creationId xmlns:a16="http://schemas.microsoft.com/office/drawing/2014/main" id="{10E59680-2E01-845D-19CA-BF17A2436BF9}"/>
+              </a:ext>
+            </a:extLst>
+          </p:cNvPr>
           <p:cNvSpPr>
             <a:spLocks noGrp="1"/>
           </p:cNvSpPr>
@@ -628,7 +651,7 @@
           <a:p>
             <a:fld id="{4929357B-58AA-43FF-A802-AA7AB61A6AAB}" type="slidenum">
               <a:rPr lang="ru-RU" smtClean="0"/>
-              <a:t>2</a:t>
+              <a:t>9</a:t>
             </a:fld>
             <a:endParaRPr lang="ru-RU"/>
           </a:p>
@@ -637,7 +660,7 @@
     </p:spTree>
     <p:extLst>
       <p:ext uri="{BB962C8B-B14F-4D97-AF65-F5344CB8AC3E}">
-        <p14:creationId xmlns:p14="http://schemas.microsoft.com/office/powerpoint/2010/main" val="3610593491"/>
+        <p14:creationId xmlns:p14="http://schemas.microsoft.com/office/powerpoint/2010/main" val="4159313301"/>
       </p:ext>
     </p:extLst>
   </p:cSld>
@@ -4133,95 +4156,95 @@
         </p:nvSpPr>
         <p:spPr>
           <a:xfrm>
-            <a:off x="1524000" y="130689"/>
-            <a:ext cx="9144000" cy="1789967"/>
+            <a:off x="3779842" y="0"/>
+            <a:ext cx="8412158" cy="1789967"/>
           </a:xfrm>
         </p:spPr>
         <p:txBody>
           <a:bodyPr>
-            <a:normAutofit fontScale="90000"/>
+            <a:noAutofit/>
           </a:bodyPr>
           <a:lstStyle/>
           <a:p>
             <a:r>
-              <a:rPr lang="ru-RU" sz="1800" dirty="0">
+              <a:rPr lang="ru-RU" sz="1400" dirty="0">
                 <a:latin typeface="Comfortaa Medium" pitchFamily="2" charset="0"/>
               </a:rPr>
               <a:t>ФЕДЕРАЛЬНОЕ ГОСУДАРСТВЕННОЕ БЮДЖЕТНОЕ ОБРАЗОВАТЕЛЬНОЕ</a:t>
             </a:r>
             <a:br>
-              <a:rPr lang="ru-RU" sz="1800" dirty="0">
+              <a:rPr lang="ru-RU" sz="1400" dirty="0">
                 <a:latin typeface="Comfortaa Medium" pitchFamily="2" charset="0"/>
               </a:rPr>
             </a:br>
             <a:r>
-              <a:rPr lang="ru-RU" sz="1800" dirty="0">
+              <a:rPr lang="ru-RU" sz="1400" dirty="0">
                 <a:latin typeface="Comfortaa Medium" pitchFamily="2" charset="0"/>
               </a:rPr>
               <a:t>УЧРЕЖДЕНИЕ ВЫСШЕГО ОБРАЗОВАНИЯ</a:t>
             </a:r>
             <a:br>
-              <a:rPr lang="ru-RU" sz="1800" dirty="0">
+              <a:rPr lang="ru-RU" sz="1400" dirty="0">
                 <a:latin typeface="Comfortaa Medium" pitchFamily="2" charset="0"/>
               </a:rPr>
             </a:br>
             <a:r>
-              <a:rPr lang="ru-RU" sz="1800" dirty="0">
+              <a:rPr lang="ru-RU" sz="1400" dirty="0">
                 <a:latin typeface="Comfortaa Medium" pitchFamily="2" charset="0"/>
               </a:rPr>
               <a:t>«САНКТ-ПЕТЕРБУРГСКИЙ ГОСУДАРСТВЕННЫЙ УНИВЕРСИТЕТ</a:t>
             </a:r>
             <a:br>
-              <a:rPr lang="ru-RU" sz="1800" dirty="0">
+              <a:rPr lang="ru-RU" sz="1400" dirty="0">
                 <a:latin typeface="Comfortaa Medium" pitchFamily="2" charset="0"/>
               </a:rPr>
             </a:br>
             <a:r>
-              <a:rPr lang="ru-RU" sz="1800" dirty="0">
+              <a:rPr lang="ru-RU" sz="1400" dirty="0">
                 <a:latin typeface="Comfortaa Medium" pitchFamily="2" charset="0"/>
               </a:rPr>
               <a:t>ТЕЛЕКОММУНИКАЦИЙ ИМ. ПРОФ. М.А. БОНЧ-БРУЕВИЧА»</a:t>
             </a:r>
             <a:br>
-              <a:rPr lang="ru-RU" sz="1800" dirty="0">
+              <a:rPr lang="ru-RU" sz="1400" dirty="0">
                 <a:latin typeface="Comfortaa Medium" pitchFamily="2" charset="0"/>
               </a:rPr>
             </a:br>
             <a:r>
-              <a:rPr lang="ru-RU" sz="1800" dirty="0">
+              <a:rPr lang="ru-RU" sz="1400" dirty="0">
                 <a:latin typeface="Comfortaa Medium" pitchFamily="2" charset="0"/>
               </a:rPr>
               <a:t>(СПбГУТ)</a:t>
             </a:r>
             <a:br>
-              <a:rPr lang="ru-RU" sz="1800" dirty="0">
+              <a:rPr lang="ru-RU" sz="1400" dirty="0">
                 <a:latin typeface="Comfortaa Medium" pitchFamily="2" charset="0"/>
               </a:rPr>
             </a:br>
             <a:r>
-              <a:rPr lang="ru-RU" sz="1800" dirty="0">
+              <a:rPr lang="ru-RU" sz="1400" dirty="0">
                 <a:latin typeface="Comfortaa Medium" pitchFamily="2" charset="0"/>
               </a:rPr>
               <a:t>АРХАНГЕЛЬСКИЙ КОЛЛЕДЖ ТЕЛЕКОММУНИКАЦИЙ</a:t>
             </a:r>
             <a:br>
-              <a:rPr lang="ru-RU" sz="1800" dirty="0">
+              <a:rPr lang="ru-RU" sz="1400" dirty="0">
                 <a:latin typeface="Comfortaa Medium" pitchFamily="2" charset="0"/>
               </a:rPr>
             </a:br>
             <a:r>
-              <a:rPr lang="ru-RU" sz="1800" dirty="0">
+              <a:rPr lang="ru-RU" sz="1400" dirty="0">
                 <a:latin typeface="Comfortaa Medium" pitchFamily="2" charset="0"/>
               </a:rPr>
               <a:t>ИМ. Б.Л. РОЗИНГА (ФИЛИАЛ) СПбГУТ</a:t>
             </a:r>
             <a:br>
-              <a:rPr lang="ru-RU" sz="1800" dirty="0">
+              <a:rPr lang="ru-RU" sz="1400" dirty="0">
                 <a:latin typeface="Comfortaa Medium" pitchFamily="2" charset="0"/>
               </a:rPr>
             </a:br>
             <a:r>
-              <a:rPr lang="ru-RU" sz="1800" dirty="0">
+              <a:rPr lang="ru-RU" sz="1400" dirty="0">
                 <a:latin typeface="Comfortaa Medium" pitchFamily="2" charset="0"/>
               </a:rPr>
               <a:t>(АКТ (ф) СПбГУТ)</a:t>
@@ -4339,7 +4362,7 @@
                   </a:solidFill>
                   <a:latin typeface="Comfortaa Medium" pitchFamily="2" charset="0"/>
                 </a:rPr>
-                <a:t>Студент ИСПП-21</a:t>
+                <a:t>Дипломник</a:t>
               </a:r>
               <a:endParaRPr lang="en-US" dirty="0">
                 <a:latin typeface="Comfortaa Medium" pitchFamily="2" charset="0"/>
@@ -4684,7 +4707,7 @@
         </p:nvSpPr>
         <p:spPr>
           <a:xfrm>
-            <a:off x="161921" y="2203791"/>
+            <a:off x="342763" y="2203790"/>
             <a:ext cx="11868159" cy="1789967"/>
           </a:xfrm>
           <a:prstGeom prst="rect">
@@ -4874,7 +4897,16 @@
               <a:rPr lang="ru-RU" sz="2600" dirty="0">
                 <a:latin typeface="Comfortaa Medium" pitchFamily="2" charset="0"/>
               </a:rPr>
-              <a:t>РАЗРАБОТКА ИНФОРМАЦИОННЫЙ СИСТЕМЫ УЧЕТА НОМЕРНОГО ФОНДА ОБЩЕЖИТИЯ</a:t>
+              <a:t>РАЗРАБОТКА ИНФОРМАЦИОННЫЙ СИСТЕМЫ </a:t>
+            </a:r>
+          </a:p>
+          <a:p>
+            <a:pPr algn="l"/>
+            <a:r>
+              <a:rPr lang="ru-RU" sz="2600" dirty="0">
+                <a:latin typeface="Comfortaa Medium" pitchFamily="2" charset="0"/>
+              </a:rPr>
+              <a:t>УЧЕТА НОМЕРНОГО ФОНДА ОБЩЕЖИТИЯ</a:t>
             </a:r>
           </a:p>
         </p:txBody>
@@ -4883,922 +4915,6 @@
     <p:extLst>
       <p:ext uri="{BB962C8B-B14F-4D97-AF65-F5344CB8AC3E}">
         <p14:creationId xmlns:p14="http://schemas.microsoft.com/office/powerpoint/2010/main" val="3589948679"/>
-      </p:ext>
-    </p:extLst>
-  </p:cSld>
-  <p:clrMapOvr>
-    <a:masterClrMapping/>
-  </p:clrMapOvr>
-  <mc:AlternateContent xmlns:mc="http://schemas.openxmlformats.org/markup-compatibility/2006" xmlns:p159="http://schemas.microsoft.com/office/powerpoint/2015/09/main">
-    <mc:Choice Requires="p159">
-      <p:transition>
-        <p159:morph option="byObject"/>
-      </p:transition>
-    </mc:Choice>
-    <mc:Fallback xmlns="">
-      <p:transition>
-        <p:fade/>
-      </p:transition>
-    </mc:Fallback>
-  </mc:AlternateContent>
-</p:sld>
-</file>
-
-<file path=ppt/slides/slide10.xml><?xml version="1.0" encoding="utf-8"?>
-<p:sld xmlns:a="http://schemas.openxmlformats.org/drawingml/2006/main" xmlns:r="http://schemas.openxmlformats.org/officeDocument/2006/relationships" xmlns:p="http://schemas.openxmlformats.org/presentationml/2006/main">
-  <p:cSld>
-    <p:spTree>
-      <p:nvGrpSpPr>
-        <p:cNvPr id="1" name="">
-          <a:extLst>
-            <a:ext uri="{FF2B5EF4-FFF2-40B4-BE49-F238E27FC236}">
-              <a16:creationId xmlns:a16="http://schemas.microsoft.com/office/drawing/2014/main" id="{BD468047-1723-AD8F-0301-C75F1C669A9E}"/>
-            </a:ext>
-          </a:extLst>
-        </p:cNvPr>
-        <p:cNvGrpSpPr/>
-        <p:nvPr/>
-      </p:nvGrpSpPr>
-      <p:grpSpPr>
-        <a:xfrm>
-          <a:off x="0" y="0"/>
-          <a:ext cx="0" cy="0"/>
-          <a:chOff x="0" y="0"/>
-          <a:chExt cx="0" cy="0"/>
-        </a:xfrm>
-      </p:grpSpPr>
-      <p:sp>
-        <p:nvSpPr>
-          <p:cNvPr id="51" name="Овал 50">
-            <a:extLst>
-              <a:ext uri="{FF2B5EF4-FFF2-40B4-BE49-F238E27FC236}">
-                <a16:creationId xmlns:a16="http://schemas.microsoft.com/office/drawing/2014/main" id="{0E4209C6-75F2-B489-1EA8-12D508196E25}"/>
-              </a:ext>
-            </a:extLst>
-          </p:cNvPr>
-          <p:cNvSpPr/>
-          <p:nvPr/>
-        </p:nvSpPr>
-        <p:spPr>
-          <a:xfrm>
-            <a:off x="8023370" y="3286998"/>
-            <a:ext cx="5481380" cy="5481380"/>
-          </a:xfrm>
-          <a:prstGeom prst="ellipse">
-            <a:avLst/>
-          </a:prstGeom>
-          <a:solidFill>
-            <a:srgbClr val="F7941D"/>
-          </a:solidFill>
-          <a:ln>
-            <a:noFill/>
-          </a:ln>
-        </p:spPr>
-        <p:style>
-          <a:lnRef idx="2">
-            <a:schemeClr val="accent1">
-              <a:shade val="15000"/>
-            </a:schemeClr>
-          </a:lnRef>
-          <a:fillRef idx="1">
-            <a:schemeClr val="accent1"/>
-          </a:fillRef>
-          <a:effectRef idx="0">
-            <a:schemeClr val="accent1"/>
-          </a:effectRef>
-          <a:fontRef idx="minor">
-            <a:schemeClr val="lt1"/>
-          </a:fontRef>
-        </p:style>
-        <p:txBody>
-          <a:bodyPr rtlCol="0" anchor="ctr"/>
-          <a:lstStyle/>
-          <a:p>
-            <a:pPr algn="ctr"/>
-            <a:endParaRPr lang="ru-RU"/>
-          </a:p>
-        </p:txBody>
-      </p:sp>
-      <p:sp>
-        <p:nvSpPr>
-          <p:cNvPr id="49" name="Овал 48">
-            <a:extLst>
-              <a:ext uri="{FF2B5EF4-FFF2-40B4-BE49-F238E27FC236}">
-                <a16:creationId xmlns:a16="http://schemas.microsoft.com/office/drawing/2014/main" id="{3F5A570D-1552-EFD2-2668-EE5F5396873C}"/>
-              </a:ext>
-            </a:extLst>
-          </p:cNvPr>
-          <p:cNvSpPr/>
-          <p:nvPr/>
-        </p:nvSpPr>
-        <p:spPr>
-          <a:xfrm>
-            <a:off x="-4296229" y="-3556000"/>
-            <a:ext cx="8076071" cy="7985662"/>
-          </a:xfrm>
-          <a:prstGeom prst="ellipse">
-            <a:avLst/>
-          </a:prstGeom>
-          <a:solidFill>
-            <a:srgbClr val="F7941D"/>
-          </a:solidFill>
-          <a:ln>
-            <a:noFill/>
-          </a:ln>
-        </p:spPr>
-        <p:style>
-          <a:lnRef idx="2">
-            <a:schemeClr val="accent1">
-              <a:shade val="15000"/>
-            </a:schemeClr>
-          </a:lnRef>
-          <a:fillRef idx="1">
-            <a:schemeClr val="accent1"/>
-          </a:fillRef>
-          <a:effectRef idx="0">
-            <a:schemeClr val="accent1"/>
-          </a:effectRef>
-          <a:fontRef idx="minor">
-            <a:schemeClr val="lt1"/>
-          </a:fontRef>
-        </p:style>
-        <p:txBody>
-          <a:bodyPr rtlCol="0" anchor="ctr"/>
-          <a:lstStyle/>
-          <a:p>
-            <a:pPr algn="ctr"/>
-            <a:endParaRPr lang="ru-RU"/>
-          </a:p>
-        </p:txBody>
-      </p:sp>
-      <p:sp>
-        <p:nvSpPr>
-          <p:cNvPr id="2" name="Заголовок 1">
-            <a:extLst>
-              <a:ext uri="{FF2B5EF4-FFF2-40B4-BE49-F238E27FC236}">
-                <a16:creationId xmlns:a16="http://schemas.microsoft.com/office/drawing/2014/main" id="{DC81D42F-9434-0117-9030-F3F9FDC52565}"/>
-              </a:ext>
-            </a:extLst>
-          </p:cNvPr>
-          <p:cNvSpPr>
-            <a:spLocks noGrp="1"/>
-          </p:cNvSpPr>
-          <p:nvPr>
-            <p:ph type="ctrTitle"/>
-          </p:nvPr>
-        </p:nvSpPr>
-        <p:spPr>
-          <a:xfrm>
-            <a:off x="1524000" y="130689"/>
-            <a:ext cx="9144000" cy="1789967"/>
-          </a:xfrm>
-        </p:spPr>
-        <p:txBody>
-          <a:bodyPr>
-            <a:normAutofit fontScale="90000"/>
-          </a:bodyPr>
-          <a:lstStyle/>
-          <a:p>
-            <a:r>
-              <a:rPr lang="ru-RU" sz="1800" dirty="0">
-                <a:latin typeface="Comfortaa Medium" pitchFamily="2" charset="0"/>
-              </a:rPr>
-              <a:t>ФЕДЕРАЛЬНОЕ ГОСУДАРСТВЕННОЕ БЮДЖЕТНОЕ ОБРАЗОВАТЕЛЬНОЕ</a:t>
-            </a:r>
-            <a:br>
-              <a:rPr lang="ru-RU" sz="1800" dirty="0">
-                <a:latin typeface="Comfortaa Medium" pitchFamily="2" charset="0"/>
-              </a:rPr>
-            </a:br>
-            <a:r>
-              <a:rPr lang="ru-RU" sz="1800" dirty="0">
-                <a:latin typeface="Comfortaa Medium" pitchFamily="2" charset="0"/>
-              </a:rPr>
-              <a:t>УЧРЕЖДЕНИЕ ВЫСШЕГО ОБРАЗОВАНИЯ</a:t>
-            </a:r>
-            <a:br>
-              <a:rPr lang="ru-RU" sz="1800" dirty="0">
-                <a:latin typeface="Comfortaa Medium" pitchFamily="2" charset="0"/>
-              </a:rPr>
-            </a:br>
-            <a:r>
-              <a:rPr lang="ru-RU" sz="1800" dirty="0">
-                <a:latin typeface="Comfortaa Medium" pitchFamily="2" charset="0"/>
-              </a:rPr>
-              <a:t>«САНКТ-ПЕТЕРБУРГСКИЙ ГОСУДАРСТВЕННЫЙ УНИВЕРСИТЕТ</a:t>
-            </a:r>
-            <a:br>
-              <a:rPr lang="ru-RU" sz="1800" dirty="0">
-                <a:latin typeface="Comfortaa Medium" pitchFamily="2" charset="0"/>
-              </a:rPr>
-            </a:br>
-            <a:r>
-              <a:rPr lang="ru-RU" sz="1800" dirty="0">
-                <a:latin typeface="Comfortaa Medium" pitchFamily="2" charset="0"/>
-              </a:rPr>
-              <a:t>ТЕЛЕКОММУНИКАЦИЙ ИМ. ПРОФ. М.А. БОНЧ-БРУЕВИЧА»</a:t>
-            </a:r>
-            <a:br>
-              <a:rPr lang="ru-RU" sz="1800" dirty="0">
-                <a:latin typeface="Comfortaa Medium" pitchFamily="2" charset="0"/>
-              </a:rPr>
-            </a:br>
-            <a:r>
-              <a:rPr lang="ru-RU" sz="1800" dirty="0">
-                <a:latin typeface="Comfortaa Medium" pitchFamily="2" charset="0"/>
-              </a:rPr>
-              <a:t>(СПбГУТ)</a:t>
-            </a:r>
-            <a:br>
-              <a:rPr lang="ru-RU" sz="1800" dirty="0">
-                <a:latin typeface="Comfortaa Medium" pitchFamily="2" charset="0"/>
-              </a:rPr>
-            </a:br>
-            <a:r>
-              <a:rPr lang="ru-RU" sz="1800" dirty="0">
-                <a:latin typeface="Comfortaa Medium" pitchFamily="2" charset="0"/>
-              </a:rPr>
-              <a:t>АРХАНГЕЛЬСКИЙ КОЛЛЕДЖ ТЕЛЕКОММУНИКАЦИЙ</a:t>
-            </a:r>
-            <a:br>
-              <a:rPr lang="ru-RU" sz="1800" dirty="0">
-                <a:latin typeface="Comfortaa Medium" pitchFamily="2" charset="0"/>
-              </a:rPr>
-            </a:br>
-            <a:r>
-              <a:rPr lang="ru-RU" sz="1800" dirty="0">
-                <a:latin typeface="Comfortaa Medium" pitchFamily="2" charset="0"/>
-              </a:rPr>
-              <a:t>ИМ. Б.Л. РОЗИНГА (ФИЛИАЛ) СПбГУТ</a:t>
-            </a:r>
-            <a:br>
-              <a:rPr lang="ru-RU" sz="1800" dirty="0">
-                <a:latin typeface="Comfortaa Medium" pitchFamily="2" charset="0"/>
-              </a:rPr>
-            </a:br>
-            <a:r>
-              <a:rPr lang="ru-RU" sz="1800" dirty="0">
-                <a:latin typeface="Comfortaa Medium" pitchFamily="2" charset="0"/>
-              </a:rPr>
-              <a:t>(АКТ (ф) СПбГУТ)</a:t>
-            </a:r>
-          </a:p>
-        </p:txBody>
-      </p:sp>
-      <p:sp>
-        <p:nvSpPr>
-          <p:cNvPr id="7" name="TextBox 6">
-            <a:extLst>
-              <a:ext uri="{FF2B5EF4-FFF2-40B4-BE49-F238E27FC236}">
-                <a16:creationId xmlns:a16="http://schemas.microsoft.com/office/drawing/2014/main" id="{34FE7F15-4652-F11D-77D3-BBB1D377C3A1}"/>
-              </a:ext>
-            </a:extLst>
-          </p:cNvPr>
-          <p:cNvSpPr txBox="1"/>
-          <p:nvPr/>
-        </p:nvSpPr>
-        <p:spPr>
-          <a:xfrm>
-            <a:off x="161921" y="6254515"/>
-            <a:ext cx="11814238" cy="369332"/>
-          </a:xfrm>
-          <a:prstGeom prst="rect">
-            <a:avLst/>
-          </a:prstGeom>
-          <a:noFill/>
-          <a:ln>
-            <a:noFill/>
-          </a:ln>
-        </p:spPr>
-        <p:txBody>
-          <a:bodyPr wrap="square">
-            <a:spAutoFit/>
-          </a:bodyPr>
-          <a:lstStyle/>
-          <a:p>
-            <a:pPr algn="ctr"/>
-            <a:r>
-              <a:rPr lang="ru-RU" dirty="0">
-                <a:solidFill>
-                  <a:srgbClr val="0A0A0A"/>
-                </a:solidFill>
-                <a:latin typeface="Comfortaa Medium" pitchFamily="2" charset="0"/>
-              </a:rPr>
-              <a:t>Архангельск 2026</a:t>
-            </a:r>
-          </a:p>
-        </p:txBody>
-      </p:sp>
-      <p:grpSp>
-        <p:nvGrpSpPr>
-          <p:cNvPr id="45" name="Группа 44">
-            <a:extLst>
-              <a:ext uri="{FF2B5EF4-FFF2-40B4-BE49-F238E27FC236}">
-                <a16:creationId xmlns:a16="http://schemas.microsoft.com/office/drawing/2014/main" id="{93345BF2-A3FB-9ED7-31C9-85DDA691CDC6}"/>
-              </a:ext>
-            </a:extLst>
-          </p:cNvPr>
-          <p:cNvGrpSpPr/>
-          <p:nvPr/>
-        </p:nvGrpSpPr>
-        <p:grpSpPr>
-          <a:xfrm>
-            <a:off x="396683" y="4447382"/>
-            <a:ext cx="7445845" cy="646331"/>
-            <a:chOff x="302493" y="3951615"/>
-            <a:chExt cx="7445845" cy="646331"/>
-          </a:xfrm>
-        </p:grpSpPr>
-        <p:sp>
-          <p:nvSpPr>
-            <p:cNvPr id="5" name="TextBox 4">
-              <a:extLst>
-                <a:ext uri="{FF2B5EF4-FFF2-40B4-BE49-F238E27FC236}">
-                  <a16:creationId xmlns:a16="http://schemas.microsoft.com/office/drawing/2014/main" id="{5BFF2BEF-88D6-DD35-ADBD-4E786975B360}"/>
-                </a:ext>
-              </a:extLst>
-            </p:cNvPr>
-            <p:cNvSpPr txBox="1"/>
-            <p:nvPr/>
-          </p:nvSpPr>
-          <p:spPr>
-            <a:xfrm>
-              <a:off x="1057275" y="3951615"/>
-              <a:ext cx="6691063" cy="646331"/>
-            </a:xfrm>
-            <a:prstGeom prst="rect">
-              <a:avLst/>
-            </a:prstGeom>
-            <a:noFill/>
-          </p:spPr>
-          <p:txBody>
-            <a:bodyPr wrap="square">
-              <a:spAutoFit/>
-            </a:bodyPr>
-            <a:lstStyle/>
-            <a:p>
-              <a:r>
-                <a:rPr lang="ru-RU" dirty="0">
-                  <a:latin typeface="Comfortaa Medium" pitchFamily="2" charset="0"/>
-                </a:rPr>
-                <a:t>Екимов Вячеслав Андреевич</a:t>
-              </a:r>
-            </a:p>
-            <a:p>
-              <a:r>
-                <a:rPr lang="ru-RU" dirty="0">
-                  <a:solidFill>
-                    <a:schemeClr val="tx1">
-                      <a:lumMod val="50000"/>
-                      <a:lumOff val="50000"/>
-                    </a:schemeClr>
-                  </a:solidFill>
-                  <a:latin typeface="Comfortaa Medium" pitchFamily="2" charset="0"/>
-                </a:rPr>
-                <a:t>Студент ИСПП-21</a:t>
-              </a:r>
-              <a:endParaRPr lang="en-US" dirty="0">
-                <a:latin typeface="Comfortaa Medium" pitchFamily="2" charset="0"/>
-              </a:endParaRPr>
-            </a:p>
-          </p:txBody>
-        </p:sp>
-        <p:grpSp>
-          <p:nvGrpSpPr>
-            <p:cNvPr id="33" name="Группа 32">
-              <a:extLst>
-                <a:ext uri="{FF2B5EF4-FFF2-40B4-BE49-F238E27FC236}">
-                  <a16:creationId xmlns:a16="http://schemas.microsoft.com/office/drawing/2014/main" id="{27CC8A91-E839-D344-0845-45A5D54C86A9}"/>
-                </a:ext>
-              </a:extLst>
-            </p:cNvPr>
-            <p:cNvGrpSpPr/>
-            <p:nvPr/>
-          </p:nvGrpSpPr>
-          <p:grpSpPr>
-            <a:xfrm>
-              <a:off x="302493" y="3992823"/>
-              <a:ext cx="656149" cy="558787"/>
-              <a:chOff x="1169726" y="3999274"/>
-              <a:chExt cx="656149" cy="558787"/>
-            </a:xfrm>
-          </p:grpSpPr>
-          <p:sp>
-            <p:nvSpPr>
-              <p:cNvPr id="14" name="Овал 13">
-                <a:extLst>
-                  <a:ext uri="{FF2B5EF4-FFF2-40B4-BE49-F238E27FC236}">
-                    <a16:creationId xmlns:a16="http://schemas.microsoft.com/office/drawing/2014/main" id="{20CAFF2D-C1DA-1C4C-B709-B5612DD08EE9}"/>
-                  </a:ext>
-                </a:extLst>
-              </p:cNvPr>
-              <p:cNvSpPr/>
-              <p:nvPr/>
-            </p:nvSpPr>
-            <p:spPr>
-              <a:xfrm>
-                <a:off x="1217679" y="3999274"/>
-                <a:ext cx="560244" cy="558787"/>
-              </a:xfrm>
-              <a:prstGeom prst="ellipse">
-                <a:avLst/>
-              </a:prstGeom>
-              <a:solidFill>
-                <a:srgbClr val="F7941D"/>
-              </a:solidFill>
-              <a:ln>
-                <a:solidFill>
-                  <a:srgbClr val="F7941D"/>
-                </a:solidFill>
-              </a:ln>
-            </p:spPr>
-            <p:style>
-              <a:lnRef idx="2">
-                <a:schemeClr val="accent1">
-                  <a:shade val="15000"/>
-                </a:schemeClr>
-              </a:lnRef>
-              <a:fillRef idx="1">
-                <a:schemeClr val="accent1"/>
-              </a:fillRef>
-              <a:effectRef idx="0">
-                <a:schemeClr val="accent1"/>
-              </a:effectRef>
-              <a:fontRef idx="minor">
-                <a:schemeClr val="lt1"/>
-              </a:fontRef>
-            </p:style>
-            <p:txBody>
-              <a:bodyPr rtlCol="0" anchor="ctr"/>
-              <a:lstStyle/>
-              <a:p>
-                <a:pPr algn="ctr"/>
-                <a:endParaRPr lang="ru-RU" sz="1400" dirty="0">
-                  <a:latin typeface="Bahnschrift" panose="020B0502040204020203" pitchFamily="34" charset="0"/>
-                </a:endParaRPr>
-              </a:p>
-            </p:txBody>
-          </p:sp>
-          <p:sp>
-            <p:nvSpPr>
-              <p:cNvPr id="16" name="TextBox 15">
-                <a:extLst>
-                  <a:ext uri="{FF2B5EF4-FFF2-40B4-BE49-F238E27FC236}">
-                    <a16:creationId xmlns:a16="http://schemas.microsoft.com/office/drawing/2014/main" id="{CB1AD2DA-3104-D320-8FEC-944E28510349}"/>
-                  </a:ext>
-                </a:extLst>
-              </p:cNvPr>
-              <p:cNvSpPr txBox="1"/>
-              <p:nvPr/>
-            </p:nvSpPr>
-            <p:spPr>
-              <a:xfrm>
-                <a:off x="1169726" y="4114784"/>
-                <a:ext cx="656149" cy="338554"/>
-              </a:xfrm>
-              <a:prstGeom prst="rect">
-                <a:avLst/>
-              </a:prstGeom>
-              <a:noFill/>
-            </p:spPr>
-            <p:txBody>
-              <a:bodyPr wrap="square">
-                <a:spAutoFit/>
-              </a:bodyPr>
-              <a:lstStyle/>
-              <a:p>
-                <a:pPr algn="ctr"/>
-                <a:r>
-                  <a:rPr lang="ru-RU" sz="1600" dirty="0">
-                    <a:solidFill>
-                      <a:schemeClr val="bg1"/>
-                    </a:solidFill>
-                    <a:latin typeface="Comfortaa Medium" pitchFamily="2" charset="0"/>
-                  </a:rPr>
-                  <a:t>ЕВ</a:t>
-                </a:r>
-                <a:endParaRPr lang="ru-RU" dirty="0">
-                  <a:solidFill>
-                    <a:schemeClr val="bg1"/>
-                  </a:solidFill>
-                  <a:latin typeface="Comfortaa Medium" pitchFamily="2" charset="0"/>
-                </a:endParaRPr>
-              </a:p>
-            </p:txBody>
-          </p:sp>
-        </p:grpSp>
-      </p:grpSp>
-      <p:grpSp>
-        <p:nvGrpSpPr>
-          <p:cNvPr id="48" name="Группа 47">
-            <a:extLst>
-              <a:ext uri="{FF2B5EF4-FFF2-40B4-BE49-F238E27FC236}">
-                <a16:creationId xmlns:a16="http://schemas.microsoft.com/office/drawing/2014/main" id="{15DA64D2-B917-371B-0C12-DA59226AA4B4}"/>
-              </a:ext>
-            </a:extLst>
-          </p:cNvPr>
-          <p:cNvGrpSpPr/>
-          <p:nvPr/>
-        </p:nvGrpSpPr>
-        <p:grpSpPr>
-          <a:xfrm>
-            <a:off x="342763" y="5325049"/>
-            <a:ext cx="7499765" cy="646331"/>
-            <a:chOff x="248573" y="5125918"/>
-            <a:chExt cx="7499765" cy="646331"/>
-          </a:xfrm>
-        </p:grpSpPr>
-        <p:sp>
-          <p:nvSpPr>
-            <p:cNvPr id="36" name="TextBox 35">
-              <a:extLst>
-                <a:ext uri="{FF2B5EF4-FFF2-40B4-BE49-F238E27FC236}">
-                  <a16:creationId xmlns:a16="http://schemas.microsoft.com/office/drawing/2014/main" id="{39F64A32-98F9-2BD6-5A18-914CE8E204B4}"/>
-                </a:ext>
-              </a:extLst>
-            </p:cNvPr>
-            <p:cNvSpPr txBox="1"/>
-            <p:nvPr/>
-          </p:nvSpPr>
-          <p:spPr>
-            <a:xfrm>
-              <a:off x="1057276" y="5125918"/>
-              <a:ext cx="6691062" cy="646331"/>
-            </a:xfrm>
-            <a:prstGeom prst="rect">
-              <a:avLst/>
-            </a:prstGeom>
-            <a:noFill/>
-            <a:ln>
-              <a:noFill/>
-            </a:ln>
-          </p:spPr>
-          <p:txBody>
-            <a:bodyPr wrap="square">
-              <a:spAutoFit/>
-            </a:bodyPr>
-            <a:lstStyle/>
-            <a:p>
-              <a:r>
-                <a:rPr lang="ru-RU" dirty="0">
-                  <a:latin typeface="Comfortaa Medium" pitchFamily="2" charset="0"/>
-                </a:rPr>
-                <a:t>Маломан Юлия Сергеевна</a:t>
-              </a:r>
-            </a:p>
-            <a:p>
-              <a:r>
-                <a:rPr lang="ru-RU" dirty="0">
-                  <a:solidFill>
-                    <a:schemeClr val="tx1">
-                      <a:lumMod val="50000"/>
-                      <a:lumOff val="50000"/>
-                    </a:schemeClr>
-                  </a:solidFill>
-                  <a:latin typeface="Comfortaa Medium" pitchFamily="2" charset="0"/>
-                </a:rPr>
-                <a:t>Руководитель</a:t>
-              </a:r>
-              <a:endParaRPr lang="en-US" dirty="0">
-                <a:latin typeface="Comfortaa Medium" pitchFamily="2" charset="0"/>
-              </a:endParaRPr>
-            </a:p>
-          </p:txBody>
-        </p:sp>
-        <p:grpSp>
-          <p:nvGrpSpPr>
-            <p:cNvPr id="31" name="Группа 30">
-              <a:extLst>
-                <a:ext uri="{FF2B5EF4-FFF2-40B4-BE49-F238E27FC236}">
-                  <a16:creationId xmlns:a16="http://schemas.microsoft.com/office/drawing/2014/main" id="{3B022DAD-55D6-6C27-2431-C28949D131BC}"/>
-                </a:ext>
-              </a:extLst>
-            </p:cNvPr>
-            <p:cNvGrpSpPr/>
-            <p:nvPr/>
-          </p:nvGrpSpPr>
-          <p:grpSpPr>
-            <a:xfrm>
-              <a:off x="248573" y="5173577"/>
-              <a:ext cx="763987" cy="558787"/>
-              <a:chOff x="1115612" y="5161951"/>
-              <a:chExt cx="763987" cy="558787"/>
-            </a:xfrm>
-          </p:grpSpPr>
-          <p:sp>
-            <p:nvSpPr>
-              <p:cNvPr id="38" name="Овал 37">
-                <a:extLst>
-                  <a:ext uri="{FF2B5EF4-FFF2-40B4-BE49-F238E27FC236}">
-                    <a16:creationId xmlns:a16="http://schemas.microsoft.com/office/drawing/2014/main" id="{636FC2B4-D333-6962-7C3D-6BE7C767CDDE}"/>
-                  </a:ext>
-                </a:extLst>
-              </p:cNvPr>
-              <p:cNvSpPr/>
-              <p:nvPr/>
-            </p:nvSpPr>
-            <p:spPr>
-              <a:xfrm>
-                <a:off x="1217221" y="5161951"/>
-                <a:ext cx="560244" cy="558787"/>
-              </a:xfrm>
-              <a:prstGeom prst="ellipse">
-                <a:avLst/>
-              </a:prstGeom>
-              <a:solidFill>
-                <a:srgbClr val="F7941D"/>
-              </a:solidFill>
-              <a:ln>
-                <a:solidFill>
-                  <a:srgbClr val="F7941D"/>
-                </a:solidFill>
-              </a:ln>
-            </p:spPr>
-            <p:style>
-              <a:lnRef idx="2">
-                <a:schemeClr val="accent1">
-                  <a:shade val="15000"/>
-                </a:schemeClr>
-              </a:lnRef>
-              <a:fillRef idx="1">
-                <a:schemeClr val="accent1"/>
-              </a:fillRef>
-              <a:effectRef idx="0">
-                <a:schemeClr val="accent1"/>
-              </a:effectRef>
-              <a:fontRef idx="minor">
-                <a:schemeClr val="lt1"/>
-              </a:fontRef>
-            </p:style>
-            <p:txBody>
-              <a:bodyPr rtlCol="0" anchor="ctr"/>
-              <a:lstStyle/>
-              <a:p>
-                <a:pPr algn="ctr"/>
-                <a:endParaRPr lang="ru-RU" sz="1400" dirty="0">
-                  <a:latin typeface="Bahnschrift" panose="020B0502040204020203" pitchFamily="34" charset="0"/>
-                </a:endParaRPr>
-              </a:p>
-            </p:txBody>
-          </p:sp>
-          <p:sp>
-            <p:nvSpPr>
-              <p:cNvPr id="40" name="TextBox 39">
-                <a:extLst>
-                  <a:ext uri="{FF2B5EF4-FFF2-40B4-BE49-F238E27FC236}">
-                    <a16:creationId xmlns:a16="http://schemas.microsoft.com/office/drawing/2014/main" id="{4F7D2E94-B0A3-9E01-FC9F-B9AAAACEC258}"/>
-                  </a:ext>
-                </a:extLst>
-              </p:cNvPr>
-              <p:cNvSpPr txBox="1"/>
-              <p:nvPr/>
-            </p:nvSpPr>
-            <p:spPr>
-              <a:xfrm>
-                <a:off x="1115612" y="5279806"/>
-                <a:ext cx="763987" cy="338554"/>
-              </a:xfrm>
-              <a:prstGeom prst="rect">
-                <a:avLst/>
-              </a:prstGeom>
-              <a:noFill/>
-            </p:spPr>
-            <p:txBody>
-              <a:bodyPr wrap="square">
-                <a:spAutoFit/>
-              </a:bodyPr>
-              <a:lstStyle/>
-              <a:p>
-                <a:pPr algn="ctr"/>
-                <a:r>
-                  <a:rPr lang="ru-RU" sz="1600" dirty="0">
-                    <a:solidFill>
-                      <a:schemeClr val="bg1"/>
-                    </a:solidFill>
-                    <a:latin typeface="Comfortaa Medium" pitchFamily="2" charset="0"/>
-                  </a:rPr>
-                  <a:t>МЮ</a:t>
-                </a:r>
-              </a:p>
-            </p:txBody>
-          </p:sp>
-        </p:grpSp>
-      </p:grpSp>
-      <p:sp>
-        <p:nvSpPr>
-          <p:cNvPr id="29" name="Подзаголовок 2">
-            <a:extLst>
-              <a:ext uri="{FF2B5EF4-FFF2-40B4-BE49-F238E27FC236}">
-                <a16:creationId xmlns:a16="http://schemas.microsoft.com/office/drawing/2014/main" id="{334ECB10-1A93-88BB-0955-3B4A086D923F}"/>
-              </a:ext>
-            </a:extLst>
-          </p:cNvPr>
-          <p:cNvSpPr txBox="1">
-            <a:spLocks/>
-          </p:cNvSpPr>
-          <p:nvPr/>
-        </p:nvSpPr>
-        <p:spPr>
-          <a:xfrm>
-            <a:off x="161921" y="2203791"/>
-            <a:ext cx="11868159" cy="1789967"/>
-          </a:xfrm>
-          <a:prstGeom prst="rect">
-            <a:avLst/>
-          </a:prstGeom>
-        </p:spPr>
-        <p:txBody>
-          <a:bodyPr vert="horz" lIns="91440" tIns="45720" rIns="91440" bIns="45720" rtlCol="0" anchor="ctr">
-            <a:normAutofit/>
-          </a:bodyPr>
-          <a:lstStyle>
-            <a:lvl1pPr marL="0" indent="0" algn="ctr" defTabSz="914400" rtl="0" eaLnBrk="1" latinLnBrk="0" hangingPunct="1">
-              <a:lnSpc>
-                <a:spcPct val="90000"/>
-              </a:lnSpc>
-              <a:spcBef>
-                <a:spcPts val="1000"/>
-              </a:spcBef>
-              <a:buFont typeface="Arial" panose="020B0604020202020204" pitchFamily="34" charset="0"/>
-              <a:buNone/>
-              <a:defRPr sz="2400" kern="1200">
-                <a:solidFill>
-                  <a:schemeClr val="tx1"/>
-                </a:solidFill>
-                <a:latin typeface="+mn-lt"/>
-                <a:ea typeface="+mn-ea"/>
-                <a:cs typeface="+mn-cs"/>
-              </a:defRPr>
-            </a:lvl1pPr>
-            <a:lvl2pPr marL="457200" indent="0" algn="ctr" defTabSz="914400" rtl="0" eaLnBrk="1" latinLnBrk="0" hangingPunct="1">
-              <a:lnSpc>
-                <a:spcPct val="90000"/>
-              </a:lnSpc>
-              <a:spcBef>
-                <a:spcPts val="500"/>
-              </a:spcBef>
-              <a:buFont typeface="Arial" panose="020B0604020202020204" pitchFamily="34" charset="0"/>
-              <a:buNone/>
-              <a:defRPr sz="2000" kern="1200">
-                <a:solidFill>
-                  <a:schemeClr val="tx1"/>
-                </a:solidFill>
-                <a:latin typeface="+mn-lt"/>
-                <a:ea typeface="+mn-ea"/>
-                <a:cs typeface="+mn-cs"/>
-              </a:defRPr>
-            </a:lvl2pPr>
-            <a:lvl3pPr marL="914400" indent="0" algn="ctr" defTabSz="914400" rtl="0" eaLnBrk="1" latinLnBrk="0" hangingPunct="1">
-              <a:lnSpc>
-                <a:spcPct val="90000"/>
-              </a:lnSpc>
-              <a:spcBef>
-                <a:spcPts val="500"/>
-              </a:spcBef>
-              <a:buFont typeface="Arial" panose="020B0604020202020204" pitchFamily="34" charset="0"/>
-              <a:buNone/>
-              <a:defRPr sz="1800" kern="1200">
-                <a:solidFill>
-                  <a:schemeClr val="tx1"/>
-                </a:solidFill>
-                <a:latin typeface="+mn-lt"/>
-                <a:ea typeface="+mn-ea"/>
-                <a:cs typeface="+mn-cs"/>
-              </a:defRPr>
-            </a:lvl3pPr>
-            <a:lvl4pPr marL="1371600" indent="0" algn="ctr" defTabSz="914400" rtl="0" eaLnBrk="1" latinLnBrk="0" hangingPunct="1">
-              <a:lnSpc>
-                <a:spcPct val="90000"/>
-              </a:lnSpc>
-              <a:spcBef>
-                <a:spcPts val="500"/>
-              </a:spcBef>
-              <a:buFont typeface="Arial" panose="020B0604020202020204" pitchFamily="34" charset="0"/>
-              <a:buNone/>
-              <a:defRPr sz="1600" kern="1200">
-                <a:solidFill>
-                  <a:schemeClr val="tx1"/>
-                </a:solidFill>
-                <a:latin typeface="+mn-lt"/>
-                <a:ea typeface="+mn-ea"/>
-                <a:cs typeface="+mn-cs"/>
-              </a:defRPr>
-            </a:lvl4pPr>
-            <a:lvl5pPr marL="1828800" indent="0" algn="ctr" defTabSz="914400" rtl="0" eaLnBrk="1" latinLnBrk="0" hangingPunct="1">
-              <a:lnSpc>
-                <a:spcPct val="90000"/>
-              </a:lnSpc>
-              <a:spcBef>
-                <a:spcPts val="500"/>
-              </a:spcBef>
-              <a:buFont typeface="Arial" panose="020B0604020202020204" pitchFamily="34" charset="0"/>
-              <a:buNone/>
-              <a:defRPr sz="1600" kern="1200">
-                <a:solidFill>
-                  <a:schemeClr val="tx1"/>
-                </a:solidFill>
-                <a:latin typeface="+mn-lt"/>
-                <a:ea typeface="+mn-ea"/>
-                <a:cs typeface="+mn-cs"/>
-              </a:defRPr>
-            </a:lvl5pPr>
-            <a:lvl6pPr marL="2286000" indent="0" algn="ctr" defTabSz="914400" rtl="0" eaLnBrk="1" latinLnBrk="0" hangingPunct="1">
-              <a:lnSpc>
-                <a:spcPct val="90000"/>
-              </a:lnSpc>
-              <a:spcBef>
-                <a:spcPts val="500"/>
-              </a:spcBef>
-              <a:buFont typeface="Arial" panose="020B0604020202020204" pitchFamily="34" charset="0"/>
-              <a:buNone/>
-              <a:defRPr sz="1600" kern="1200">
-                <a:solidFill>
-                  <a:schemeClr val="tx1"/>
-                </a:solidFill>
-                <a:latin typeface="+mn-lt"/>
-                <a:ea typeface="+mn-ea"/>
-                <a:cs typeface="+mn-cs"/>
-              </a:defRPr>
-            </a:lvl6pPr>
-            <a:lvl7pPr marL="2743200" indent="0" algn="ctr" defTabSz="914400" rtl="0" eaLnBrk="1" latinLnBrk="0" hangingPunct="1">
-              <a:lnSpc>
-                <a:spcPct val="90000"/>
-              </a:lnSpc>
-              <a:spcBef>
-                <a:spcPts val="500"/>
-              </a:spcBef>
-              <a:buFont typeface="Arial" panose="020B0604020202020204" pitchFamily="34" charset="0"/>
-              <a:buNone/>
-              <a:defRPr sz="1600" kern="1200">
-                <a:solidFill>
-                  <a:schemeClr val="tx1"/>
-                </a:solidFill>
-                <a:latin typeface="+mn-lt"/>
-                <a:ea typeface="+mn-ea"/>
-                <a:cs typeface="+mn-cs"/>
-              </a:defRPr>
-            </a:lvl7pPr>
-            <a:lvl8pPr marL="3200400" indent="0" algn="ctr" defTabSz="914400" rtl="0" eaLnBrk="1" latinLnBrk="0" hangingPunct="1">
-              <a:lnSpc>
-                <a:spcPct val="90000"/>
-              </a:lnSpc>
-              <a:spcBef>
-                <a:spcPts val="500"/>
-              </a:spcBef>
-              <a:buFont typeface="Arial" panose="020B0604020202020204" pitchFamily="34" charset="0"/>
-              <a:buNone/>
-              <a:defRPr sz="1600" kern="1200">
-                <a:solidFill>
-                  <a:schemeClr val="tx1"/>
-                </a:solidFill>
-                <a:latin typeface="+mn-lt"/>
-                <a:ea typeface="+mn-ea"/>
-                <a:cs typeface="+mn-cs"/>
-              </a:defRPr>
-            </a:lvl8pPr>
-            <a:lvl9pPr marL="3657600" indent="0" algn="ctr" defTabSz="914400" rtl="0" eaLnBrk="1" latinLnBrk="0" hangingPunct="1">
-              <a:lnSpc>
-                <a:spcPct val="90000"/>
-              </a:lnSpc>
-              <a:spcBef>
-                <a:spcPts val="500"/>
-              </a:spcBef>
-              <a:buFont typeface="Arial" panose="020B0604020202020204" pitchFamily="34" charset="0"/>
-              <a:buNone/>
-              <a:defRPr sz="1600" kern="1200">
-                <a:solidFill>
-                  <a:schemeClr val="tx1"/>
-                </a:solidFill>
-                <a:latin typeface="+mn-lt"/>
-                <a:ea typeface="+mn-ea"/>
-                <a:cs typeface="+mn-cs"/>
-              </a:defRPr>
-            </a:lvl9pPr>
-          </a:lstStyle>
-          <a:p>
-            <a:pPr algn="l"/>
-            <a:r>
-              <a:rPr lang="ru-RU" sz="5200" dirty="0">
-                <a:latin typeface="Comfortaa Medium" pitchFamily="2" charset="0"/>
-              </a:rPr>
-              <a:t>ДИПЛОМНЫЙ ПРОЕКТ</a:t>
-            </a:r>
-          </a:p>
-          <a:p>
-            <a:pPr algn="l"/>
-            <a:r>
-              <a:rPr lang="ru-RU" sz="2600" dirty="0">
-                <a:latin typeface="Comfortaa Medium" pitchFamily="2" charset="0"/>
-              </a:rPr>
-              <a:t>РАЗРАБОТКА ИНФОРМАЦИОННЫЙ СИСТЕМЫ УЧЕТА НОМЕРНОГО ФОНДА ОБЩЕЖИТИЯ</a:t>
-            </a:r>
-          </a:p>
-        </p:txBody>
-      </p:sp>
-    </p:spTree>
-    <p:extLst>
-      <p:ext uri="{BB962C8B-B14F-4D97-AF65-F5344CB8AC3E}">
-        <p14:creationId xmlns:p14="http://schemas.microsoft.com/office/powerpoint/2010/main" val="1731539914"/>
       </p:ext>
     </p:extLst>
   </p:cSld>
@@ -5833,7 +4949,13 @@
     </p:bg>
     <p:spTree>
       <p:nvGrpSpPr>
-        <p:cNvPr id="1" name=""/>
+        <p:cNvPr id="1" name="">
+          <a:extLst>
+            <a:ext uri="{FF2B5EF4-FFF2-40B4-BE49-F238E27FC236}">
+              <a16:creationId xmlns:a16="http://schemas.microsoft.com/office/drawing/2014/main" id="{9CC2D230-5E2F-E325-51E5-751E18A28D39}"/>
+            </a:ext>
+          </a:extLst>
+        </p:cNvPr>
         <p:cNvGrpSpPr/>
         <p:nvPr/>
       </p:nvGrpSpPr>
@@ -5847,10 +4969,66 @@
       </p:grpSpPr>
       <p:sp>
         <p:nvSpPr>
-          <p:cNvPr id="6" name="Прямоугольник: скругленные углы 5">
-            <a:extLst>
-              <a:ext uri="{FF2B5EF4-FFF2-40B4-BE49-F238E27FC236}">
-                <a16:creationId xmlns:a16="http://schemas.microsoft.com/office/drawing/2014/main" id="{098A26E4-6008-04F1-A835-622B51F65FCB}"/>
+          <p:cNvPr id="3" name="Прямоугольник: скругленные углы 2">
+            <a:extLst>
+              <a:ext uri="{FF2B5EF4-FFF2-40B4-BE49-F238E27FC236}">
+                <a16:creationId xmlns:a16="http://schemas.microsoft.com/office/drawing/2014/main" id="{A4FB9E8B-2EFD-604A-027C-0433D1447EE3}"/>
+              </a:ext>
+            </a:extLst>
+          </p:cNvPr>
+          <p:cNvSpPr/>
+          <p:nvPr/>
+        </p:nvSpPr>
+        <p:spPr>
+          <a:xfrm>
+            <a:off x="660400" y="1841122"/>
+            <a:ext cx="4660150" cy="3175755"/>
+          </a:xfrm>
+          <a:prstGeom prst="roundRect">
+            <a:avLst>
+              <a:gd name="adj" fmla="val 4689"/>
+            </a:avLst>
+          </a:prstGeom>
+          <a:solidFill>
+            <a:schemeClr val="bg1"/>
+          </a:solidFill>
+          <a:ln>
+            <a:solidFill>
+              <a:srgbClr val="FFA726"/>
+            </a:solidFill>
+          </a:ln>
+        </p:spPr>
+        <p:style>
+          <a:lnRef idx="2">
+            <a:schemeClr val="accent1">
+              <a:shade val="15000"/>
+            </a:schemeClr>
+          </a:lnRef>
+          <a:fillRef idx="1">
+            <a:schemeClr val="accent1"/>
+          </a:fillRef>
+          <a:effectRef idx="0">
+            <a:schemeClr val="accent1"/>
+          </a:effectRef>
+          <a:fontRef idx="minor">
+            <a:schemeClr val="lt1"/>
+          </a:fontRef>
+        </p:style>
+        <p:txBody>
+          <a:bodyPr rtlCol="0" anchor="ctr"/>
+          <a:lstStyle/>
+          <a:p>
+            <a:pPr algn="ctr"/>
+            <a:endParaRPr lang="ru-RU" dirty="0"/>
+          </a:p>
+        </p:txBody>
+      </p:sp>
+      <p:sp>
+        <p:nvSpPr>
+          <p:cNvPr id="35" name="Прямоугольник: скругленные углы 34">
+            <a:extLst>
+              <a:ext uri="{FF2B5EF4-FFF2-40B4-BE49-F238E27FC236}">
+                <a16:creationId xmlns:a16="http://schemas.microsoft.com/office/drawing/2014/main" id="{B0166C61-C690-81AE-91B8-293C4A8C2B44}"/>
               </a:ext>
             </a:extLst>
           </p:cNvPr>
@@ -5903,245 +5081,10 @@
       </p:sp>
       <p:sp>
         <p:nvSpPr>
-          <p:cNvPr id="90" name="Овал 89">
-            <a:extLst>
-              <a:ext uri="{FF2B5EF4-FFF2-40B4-BE49-F238E27FC236}">
-                <a16:creationId xmlns:a16="http://schemas.microsoft.com/office/drawing/2014/main" id="{EE661BD3-8ABE-F6AF-1581-DD5D1F6B1B9D}"/>
-              </a:ext>
-            </a:extLst>
-          </p:cNvPr>
-          <p:cNvSpPr/>
-          <p:nvPr/>
-        </p:nvSpPr>
-        <p:spPr>
-          <a:xfrm>
-            <a:off x="6858000" y="-446583"/>
-            <a:ext cx="7975563" cy="7975563"/>
-          </a:xfrm>
-          <a:prstGeom prst="ellipse">
-            <a:avLst/>
-          </a:prstGeom>
-          <a:solidFill>
-            <a:srgbClr val="F7941D"/>
-          </a:solidFill>
-          <a:ln>
-            <a:noFill/>
-          </a:ln>
-        </p:spPr>
-        <p:style>
-          <a:lnRef idx="2">
-            <a:schemeClr val="accent1">
-              <a:shade val="15000"/>
-            </a:schemeClr>
-          </a:lnRef>
-          <a:fillRef idx="1">
-            <a:schemeClr val="accent1"/>
-          </a:fillRef>
-          <a:effectRef idx="0">
-            <a:schemeClr val="accent1"/>
-          </a:effectRef>
-          <a:fontRef idx="minor">
-            <a:schemeClr val="lt1"/>
-          </a:fontRef>
-        </p:style>
-        <p:txBody>
-          <a:bodyPr rtlCol="0" anchor="ctr"/>
-          <a:lstStyle/>
-          <a:p>
-            <a:pPr algn="ctr"/>
-            <a:endParaRPr lang="ru-RU" dirty="0"/>
-          </a:p>
-        </p:txBody>
-      </p:sp>
-      <p:pic>
-        <p:nvPicPr>
-          <p:cNvPr id="2052" name="Picture 4" descr="Скачать картинки Куча бумаг, стоковые фото Куча бумаг в ...">
-            <a:extLst>
-              <a:ext uri="{FF2B5EF4-FFF2-40B4-BE49-F238E27FC236}">
-                <a16:creationId xmlns:a16="http://schemas.microsoft.com/office/drawing/2014/main" id="{46FCE9F9-7F4E-6496-A377-697DCB8F1045}"/>
-              </a:ext>
-            </a:extLst>
-          </p:cNvPr>
-          <p:cNvPicPr>
-            <a:picLocks noChangeAspect="1" noChangeArrowheads="1"/>
-          </p:cNvPicPr>
-          <p:nvPr/>
-        </p:nvPicPr>
-        <p:blipFill rotWithShape="1">
-          <a:blip r:embed="rId3">
-            <a:extLst>
-              <a:ext uri="{BEBA8EAE-BF5A-486C-A8C5-ECC9F3942E4B}">
-                <a14:imgProps xmlns:a14="http://schemas.microsoft.com/office/drawing/2010/main">
-                  <a14:imgLayer r:embed="rId4">
-                    <a14:imgEffect>
-                      <a14:backgroundRemoval t="10000" b="90000" l="10000" r="90000">
-                        <a14:foregroundMark x1="80912" y1="32432" x2="75169" y2="20120"/>
-                        <a14:foregroundMark x1="75169" y1="20120" x2="84122" y2="23423"/>
-                        <a14:foregroundMark x1="88851" y1="15015" x2="80236" y2="14715"/>
-                        <a14:foregroundMark x1="72128" y1="85886" x2="86149" y2="89189"/>
-                        <a14:foregroundMark x1="86149" y1="89189" x2="88682" y2="87387"/>
-                        <a14:foregroundMark x1="58446" y1="88589" x2="58108" y2="42643"/>
-                        <a14:foregroundMark x1="58108" y1="42643" x2="44595" y2="40841"/>
-                        <a14:foregroundMark x1="44595" y1="40841" x2="40114" y2="55131"/>
-                        <a14:foregroundMark x1="39311" y1="64993" x2="40034" y2="74174"/>
-                        <a14:foregroundMark x1="40034" y1="74174" x2="55574" y2="88889"/>
-                        <a14:foregroundMark x1="55574" y1="88889" x2="58615" y2="89189"/>
-                        <a14:foregroundMark x1="9966" y1="68168" x2="24324" y2="68468"/>
-                        <a14:foregroundMark x1="24324" y1="68468" x2="27365" y2="86486"/>
-                        <a14:foregroundMark x1="27365" y1="86486" x2="16723" y2="86186"/>
-                        <a14:foregroundMark x1="16723" y1="86186" x2="10473" y2="74775"/>
-                        <a14:foregroundMark x1="10473" y1="74775" x2="10642" y2="70270"/>
-                        <a14:backgroundMark x1="39020" y1="54955" x2="38514" y2="64865"/>
-                      </a14:backgroundRemoval>
-                    </a14:imgEffect>
-                  </a14:imgLayer>
-                </a14:imgProps>
-              </a:ext>
-              <a:ext uri="{28A0092B-C50C-407E-A947-70E740481C1C}">
-                <a14:useLocalDpi xmlns:a14="http://schemas.microsoft.com/office/drawing/2010/main" val="0"/>
-              </a:ext>
-            </a:extLst>
-          </a:blip>
-          <a:srcRect l="8022" t="10350" r="8680" b="7103"/>
-          <a:stretch>
-            <a:fillRect/>
-          </a:stretch>
-        </p:blipFill>
-        <p:spPr bwMode="auto">
-          <a:xfrm>
-            <a:off x="621569" y="1975596"/>
-            <a:ext cx="5617102" cy="3131206"/>
-          </a:xfrm>
-          <a:prstGeom prst="rect">
-            <a:avLst/>
-          </a:prstGeom>
-          <a:noFill/>
-          <a:extLst>
-            <a:ext uri="{909E8E84-426E-40DD-AFC4-6F175D3DCCD1}">
-              <a14:hiddenFill xmlns:a14="http://schemas.microsoft.com/office/drawing/2010/main">
-                <a:solidFill>
-                  <a:srgbClr val="FFFFFF"/>
-                </a:solidFill>
-              </a14:hiddenFill>
-            </a:ext>
-          </a:extLst>
-        </p:spPr>
-      </p:pic>
-      <p:sp>
-        <p:nvSpPr>
-          <p:cNvPr id="93" name="Стрелка: вправо 92">
-            <a:extLst>
-              <a:ext uri="{FF2B5EF4-FFF2-40B4-BE49-F238E27FC236}">
-                <a16:creationId xmlns:a16="http://schemas.microsoft.com/office/drawing/2014/main" id="{89B02C87-EA98-D2D3-171E-8F8682601E35}"/>
-              </a:ext>
-            </a:extLst>
-          </p:cNvPr>
-          <p:cNvSpPr/>
-          <p:nvPr/>
-        </p:nvSpPr>
-        <p:spPr>
-          <a:xfrm>
-            <a:off x="621569" y="5245151"/>
-            <a:ext cx="5525585" cy="167330"/>
-          </a:xfrm>
-          <a:prstGeom prst="rightArrow">
-            <a:avLst>
-              <a:gd name="adj1" fmla="val 50000"/>
-              <a:gd name="adj2" fmla="val 150859"/>
-            </a:avLst>
-          </a:prstGeom>
-          <a:solidFill>
-            <a:srgbClr val="F7941D"/>
-          </a:solidFill>
-          <a:ln>
-            <a:solidFill>
-              <a:srgbClr val="F7941D"/>
-            </a:solidFill>
-          </a:ln>
-        </p:spPr>
-        <p:style>
-          <a:lnRef idx="2">
-            <a:schemeClr val="dk1">
-              <a:shade val="15000"/>
-            </a:schemeClr>
-          </a:lnRef>
-          <a:fillRef idx="1">
-            <a:schemeClr val="dk1"/>
-          </a:fillRef>
-          <a:effectRef idx="0">
-            <a:schemeClr val="dk1"/>
-          </a:effectRef>
-          <a:fontRef idx="minor">
-            <a:schemeClr val="lt1"/>
-          </a:fontRef>
-        </p:style>
-        <p:txBody>
-          <a:bodyPr rtlCol="0" anchor="ctr"/>
-          <a:lstStyle/>
-          <a:p>
-            <a:pPr algn="ctr"/>
-            <a:endParaRPr lang="ru-RU"/>
-          </a:p>
-        </p:txBody>
-      </p:sp>
-      <p:sp>
-        <p:nvSpPr>
-          <p:cNvPr id="88" name="Овал 87">
-            <a:extLst>
-              <a:ext uri="{FF2B5EF4-FFF2-40B4-BE49-F238E27FC236}">
-                <a16:creationId xmlns:a16="http://schemas.microsoft.com/office/drawing/2014/main" id="{DC7D9FDD-6B0B-CF79-AE70-C373A0A68BD0}"/>
-              </a:ext>
-            </a:extLst>
-          </p:cNvPr>
-          <p:cNvSpPr/>
-          <p:nvPr/>
-        </p:nvSpPr>
-        <p:spPr>
-          <a:xfrm>
-            <a:off x="-8740573" y="-7109361"/>
-            <a:ext cx="8076071" cy="7985662"/>
-          </a:xfrm>
-          <a:prstGeom prst="ellipse">
-            <a:avLst/>
-          </a:prstGeom>
-          <a:solidFill>
-            <a:srgbClr val="F7941D"/>
-          </a:solidFill>
-          <a:ln>
-            <a:noFill/>
-          </a:ln>
-        </p:spPr>
-        <p:style>
-          <a:lnRef idx="2">
-            <a:schemeClr val="accent1">
-              <a:shade val="15000"/>
-            </a:schemeClr>
-          </a:lnRef>
-          <a:fillRef idx="1">
-            <a:schemeClr val="accent1"/>
-          </a:fillRef>
-          <a:effectRef idx="0">
-            <a:schemeClr val="accent1"/>
-          </a:effectRef>
-          <a:fontRef idx="minor">
-            <a:schemeClr val="lt1"/>
-          </a:fontRef>
-        </p:style>
-        <p:txBody>
-          <a:bodyPr rtlCol="0" anchor="ctr"/>
-          <a:lstStyle/>
-          <a:p>
-            <a:pPr algn="ctr"/>
-            <a:endParaRPr lang="ru-RU"/>
-          </a:p>
-        </p:txBody>
-      </p:sp>
-      <p:sp>
-        <p:nvSpPr>
-          <p:cNvPr id="19" name="Прямоугольник 18">
-            <a:extLst>
-              <a:ext uri="{FF2B5EF4-FFF2-40B4-BE49-F238E27FC236}">
-                <a16:creationId xmlns:a16="http://schemas.microsoft.com/office/drawing/2014/main" id="{C2EBA9C0-B33C-92B7-9338-3413A14F9A5B}"/>
+          <p:cNvPr id="14" name="Прямоугольник 13">
+            <a:extLst>
+              <a:ext uri="{FF2B5EF4-FFF2-40B4-BE49-F238E27FC236}">
+                <a16:creationId xmlns:a16="http://schemas.microsoft.com/office/drawing/2014/main" id="{B6D646FD-AFE7-01D7-1566-607136C799C5}"/>
               </a:ext>
             </a:extLst>
           </p:cNvPr>
@@ -6190,303 +5133,6 @@
       </p:sp>
       <p:sp>
         <p:nvSpPr>
-          <p:cNvPr id="21" name="Прямоугольник 20">
-            <a:extLst>
-              <a:ext uri="{FF2B5EF4-FFF2-40B4-BE49-F238E27FC236}">
-                <a16:creationId xmlns:a16="http://schemas.microsoft.com/office/drawing/2014/main" id="{D5BB8AFC-DF29-AB66-823A-6608C13F3DDE}"/>
-              </a:ext>
-            </a:extLst>
-          </p:cNvPr>
-          <p:cNvSpPr/>
-          <p:nvPr/>
-        </p:nvSpPr>
-        <p:spPr>
-          <a:xfrm>
-            <a:off x="-3572" y="6690671"/>
-            <a:ext cx="1527572" cy="167330"/>
-          </a:xfrm>
-          <a:prstGeom prst="rect">
-            <a:avLst/>
-          </a:prstGeom>
-          <a:solidFill>
-            <a:srgbClr val="F7941D"/>
-          </a:solidFill>
-          <a:ln>
-            <a:noFill/>
-          </a:ln>
-        </p:spPr>
-        <p:style>
-          <a:lnRef idx="2">
-            <a:schemeClr val="accent1">
-              <a:shade val="15000"/>
-            </a:schemeClr>
-          </a:lnRef>
-          <a:fillRef idx="1">
-            <a:schemeClr val="accent1"/>
-          </a:fillRef>
-          <a:effectRef idx="0">
-            <a:schemeClr val="accent1"/>
-          </a:effectRef>
-          <a:fontRef idx="minor">
-            <a:schemeClr val="lt1"/>
-          </a:fontRef>
-        </p:style>
-        <p:txBody>
-          <a:bodyPr rtlCol="0" anchor="ctr"/>
-          <a:lstStyle/>
-          <a:p>
-            <a:pPr algn="ctr"/>
-            <a:endParaRPr lang="ru-RU"/>
-          </a:p>
-        </p:txBody>
-      </p:sp>
-      <p:sp>
-        <p:nvSpPr>
-          <p:cNvPr id="2" name="Заголовок 1">
-            <a:extLst>
-              <a:ext uri="{FF2B5EF4-FFF2-40B4-BE49-F238E27FC236}">
-                <a16:creationId xmlns:a16="http://schemas.microsoft.com/office/drawing/2014/main" id="{D7B45FB0-A546-4878-5B8B-7AEECEA52394}"/>
-              </a:ext>
-            </a:extLst>
-          </p:cNvPr>
-          <p:cNvSpPr>
-            <a:spLocks noGrp="1"/>
-          </p:cNvSpPr>
-          <p:nvPr>
-            <p:ph type="title"/>
-          </p:nvPr>
-        </p:nvSpPr>
-        <p:spPr>
-          <a:xfrm>
-            <a:off x="190500" y="228389"/>
-            <a:ext cx="10952621" cy="509563"/>
-          </a:xfrm>
-        </p:spPr>
-        <p:txBody>
-          <a:bodyPr>
-            <a:noAutofit/>
-          </a:bodyPr>
-          <a:lstStyle/>
-          <a:p>
-            <a:r>
-              <a:rPr lang="ru-RU" sz="3200" dirty="0">
-                <a:latin typeface="Comfortaa Medium" pitchFamily="2" charset="0"/>
-              </a:rPr>
-              <a:t>Актуальность</a:t>
-            </a:r>
-          </a:p>
-        </p:txBody>
-      </p:sp>
-      <p:sp>
-        <p:nvSpPr>
-          <p:cNvPr id="95" name="TextBox 94">
-            <a:extLst>
-              <a:ext uri="{FF2B5EF4-FFF2-40B4-BE49-F238E27FC236}">
-                <a16:creationId xmlns:a16="http://schemas.microsoft.com/office/drawing/2014/main" id="{1DBC4A07-BC32-ED40-CCE7-415E8FEEE04D}"/>
-              </a:ext>
-            </a:extLst>
-          </p:cNvPr>
-          <p:cNvSpPr txBox="1"/>
-          <p:nvPr/>
-        </p:nvSpPr>
-        <p:spPr>
-          <a:xfrm>
-            <a:off x="7432610" y="2140526"/>
-            <a:ext cx="4568890" cy="2801344"/>
-          </a:xfrm>
-          <a:prstGeom prst="rect">
-            <a:avLst/>
-          </a:prstGeom>
-          <a:noFill/>
-        </p:spPr>
-        <p:txBody>
-          <a:bodyPr wrap="square">
-            <a:spAutoFit/>
-          </a:bodyPr>
-          <a:lstStyle/>
-          <a:p>
-            <a:pPr lvl="0">
-              <a:lnSpc>
-                <a:spcPct val="150000"/>
-              </a:lnSpc>
-            </a:pPr>
-            <a:r>
-              <a:rPr lang="ru-RU" sz="2400" dirty="0">
-                <a:solidFill>
-                  <a:schemeClr val="bg1"/>
-                </a:solidFill>
-                <a:latin typeface="Comfortaa Medium" pitchFamily="2" charset="0"/>
-              </a:rPr>
-              <a:t>Отсутствие единой системы учета осложняет управление фондом студенческих общежитий</a:t>
-            </a:r>
-            <a:r>
-              <a:rPr lang="ru-RU" dirty="0">
-                <a:solidFill>
-                  <a:schemeClr val="bg1"/>
-                </a:solidFill>
-                <a:latin typeface="Comfortaa Medium" pitchFamily="2" charset="0"/>
-              </a:rPr>
-              <a:t>.</a:t>
-            </a:r>
-            <a:endParaRPr lang="ru-RU" sz="1800" b="0" i="0" u="none" strike="noStrike" cap="none" dirty="0">
-              <a:solidFill>
-                <a:schemeClr val="bg1"/>
-              </a:solidFill>
-              <a:latin typeface="Comfortaa Medium" pitchFamily="2" charset="0"/>
-              <a:ea typeface="Calibri"/>
-              <a:cs typeface="Calibri"/>
-              <a:sym typeface="Calibri"/>
-            </a:endParaRPr>
-          </a:p>
-        </p:txBody>
-      </p:sp>
-      <p:sp>
-        <p:nvSpPr>
-          <p:cNvPr id="99" name="TextBox 98">
-            <a:extLst>
-              <a:ext uri="{FF2B5EF4-FFF2-40B4-BE49-F238E27FC236}">
-                <a16:creationId xmlns:a16="http://schemas.microsoft.com/office/drawing/2014/main" id="{FB5F6E4C-5E1C-65B4-0E40-A930FB628E6E}"/>
-              </a:ext>
-            </a:extLst>
-          </p:cNvPr>
-          <p:cNvSpPr txBox="1"/>
-          <p:nvPr/>
-        </p:nvSpPr>
-        <p:spPr>
-          <a:xfrm>
-            <a:off x="11877674" y="6321339"/>
-            <a:ext cx="314325" cy="369332"/>
-          </a:xfrm>
-          <a:prstGeom prst="rect">
-            <a:avLst/>
-          </a:prstGeom>
-          <a:noFill/>
-        </p:spPr>
-        <p:txBody>
-          <a:bodyPr wrap="square">
-            <a:spAutoFit/>
-          </a:bodyPr>
-          <a:lstStyle/>
-          <a:p>
-            <a:r>
-              <a:rPr lang="ru-RU" dirty="0">
-                <a:latin typeface="Comfortaa Medium" pitchFamily="2" charset="0"/>
-              </a:rPr>
-              <a:t>2</a:t>
-            </a:r>
-          </a:p>
-        </p:txBody>
-      </p:sp>
-    </p:spTree>
-    <p:extLst>
-      <p:ext uri="{BB962C8B-B14F-4D97-AF65-F5344CB8AC3E}">
-        <p14:creationId xmlns:p14="http://schemas.microsoft.com/office/powerpoint/2010/main" val="4157273508"/>
-      </p:ext>
-    </p:extLst>
-  </p:cSld>
-  <p:clrMapOvr>
-    <a:masterClrMapping/>
-  </p:clrMapOvr>
-  <mc:AlternateContent xmlns:mc="http://schemas.openxmlformats.org/markup-compatibility/2006" xmlns:p159="http://schemas.microsoft.com/office/powerpoint/2015/09/main">
-    <mc:Choice Requires="p159">
-      <p:transition>
-        <p159:morph option="byObject"/>
-      </p:transition>
-    </mc:Choice>
-    <mc:Fallback xmlns="">
-      <p:transition>
-        <p:fade/>
-      </p:transition>
-    </mc:Fallback>
-  </mc:AlternateContent>
-</p:sld>
-</file>
-
-<file path=ppt/slides/slide3.xml><?xml version="1.0" encoding="utf-8"?>
-<p:sld xmlns:a="http://schemas.openxmlformats.org/drawingml/2006/main" xmlns:r="http://schemas.openxmlformats.org/officeDocument/2006/relationships" xmlns:p="http://schemas.openxmlformats.org/presentationml/2006/main">
-  <p:cSld>
-    <p:bg>
-      <p:bgPr>
-        <a:solidFill>
-          <a:srgbClr val="F4F7FB"/>
-        </a:solidFill>
-        <a:effectLst/>
-      </p:bgPr>
-    </p:bg>
-    <p:spTree>
-      <p:nvGrpSpPr>
-        <p:cNvPr id="1" name="">
-          <a:extLst>
-            <a:ext uri="{FF2B5EF4-FFF2-40B4-BE49-F238E27FC236}">
-              <a16:creationId xmlns:a16="http://schemas.microsoft.com/office/drawing/2014/main" id="{9CC2D230-5E2F-E325-51E5-751E18A28D39}"/>
-            </a:ext>
-          </a:extLst>
-        </p:cNvPr>
-        <p:cNvGrpSpPr/>
-        <p:nvPr/>
-      </p:nvGrpSpPr>
-      <p:grpSpPr>
-        <a:xfrm>
-          <a:off x="0" y="0"/>
-          <a:ext cx="0" cy="0"/>
-          <a:chOff x="0" y="0"/>
-          <a:chExt cx="0" cy="0"/>
-        </a:xfrm>
-      </p:grpSpPr>
-      <p:sp>
-        <p:nvSpPr>
-          <p:cNvPr id="14" name="Прямоугольник 13">
-            <a:extLst>
-              <a:ext uri="{FF2B5EF4-FFF2-40B4-BE49-F238E27FC236}">
-                <a16:creationId xmlns:a16="http://schemas.microsoft.com/office/drawing/2014/main" id="{B6D646FD-AFE7-01D7-1566-607136C799C5}"/>
-              </a:ext>
-            </a:extLst>
-          </p:cNvPr>
-          <p:cNvSpPr/>
-          <p:nvPr/>
-        </p:nvSpPr>
-        <p:spPr>
-          <a:xfrm>
-            <a:off x="0" y="6690671"/>
-            <a:ext cx="12192000" cy="167330"/>
-          </a:xfrm>
-          <a:prstGeom prst="rect">
-            <a:avLst/>
-          </a:prstGeom>
-          <a:solidFill>
-            <a:schemeClr val="bg1"/>
-          </a:solidFill>
-          <a:ln>
-            <a:noFill/>
-          </a:ln>
-        </p:spPr>
-        <p:style>
-          <a:lnRef idx="2">
-            <a:schemeClr val="accent1">
-              <a:shade val="15000"/>
-            </a:schemeClr>
-          </a:lnRef>
-          <a:fillRef idx="1">
-            <a:schemeClr val="accent1"/>
-          </a:fillRef>
-          <a:effectRef idx="0">
-            <a:schemeClr val="accent1"/>
-          </a:effectRef>
-          <a:fontRef idx="minor">
-            <a:schemeClr val="lt1"/>
-          </a:fontRef>
-        </p:style>
-        <p:txBody>
-          <a:bodyPr rtlCol="0" anchor="ctr"/>
-          <a:lstStyle/>
-          <a:p>
-            <a:pPr algn="ctr"/>
-            <a:endParaRPr lang="ru-RU"/>
-          </a:p>
-        </p:txBody>
-      </p:sp>
-      <p:sp>
-        <p:nvSpPr>
           <p:cNvPr id="16" name="Прямоугольник 15">
             <a:extLst>
               <a:ext uri="{FF2B5EF4-FFF2-40B4-BE49-F238E27FC236}">
@@ -6539,58 +5185,6 @@
       </p:sp>
       <p:sp>
         <p:nvSpPr>
-          <p:cNvPr id="51" name="Овал 50">
-            <a:extLst>
-              <a:ext uri="{FF2B5EF4-FFF2-40B4-BE49-F238E27FC236}">
-                <a16:creationId xmlns:a16="http://schemas.microsoft.com/office/drawing/2014/main" id="{C7361E6E-5035-820A-E110-11E3FB21F576}"/>
-              </a:ext>
-            </a:extLst>
-          </p:cNvPr>
-          <p:cNvSpPr/>
-          <p:nvPr/>
-        </p:nvSpPr>
-        <p:spPr>
-          <a:xfrm>
-            <a:off x="-2794135" y="-770761"/>
-            <a:ext cx="7975563" cy="7975563"/>
-          </a:xfrm>
-          <a:prstGeom prst="ellipse">
-            <a:avLst/>
-          </a:prstGeom>
-          <a:solidFill>
-            <a:srgbClr val="F7941D"/>
-          </a:solidFill>
-          <a:ln>
-            <a:noFill/>
-          </a:ln>
-        </p:spPr>
-        <p:style>
-          <a:lnRef idx="2">
-            <a:schemeClr val="accent1">
-              <a:shade val="15000"/>
-            </a:schemeClr>
-          </a:lnRef>
-          <a:fillRef idx="1">
-            <a:schemeClr val="accent1"/>
-          </a:fillRef>
-          <a:effectRef idx="0">
-            <a:schemeClr val="accent1"/>
-          </a:effectRef>
-          <a:fontRef idx="minor">
-            <a:schemeClr val="lt1"/>
-          </a:fontRef>
-        </p:style>
-        <p:txBody>
-          <a:bodyPr rtlCol="0" anchor="ctr"/>
-          <a:lstStyle/>
-          <a:p>
-            <a:pPr algn="ctr"/>
-            <a:endParaRPr lang="ru-RU" dirty="0"/>
-          </a:p>
-        </p:txBody>
-      </p:sp>
-      <p:sp>
-        <p:nvSpPr>
           <p:cNvPr id="84" name="TextBox 83">
             <a:extLst>
               <a:ext uri="{FF2B5EF4-FFF2-40B4-BE49-F238E27FC236}">
@@ -6603,8 +5197,8 @@
         </p:nvSpPr>
         <p:spPr>
           <a:xfrm>
-            <a:off x="635598" y="2286918"/>
-            <a:ext cx="4355502" cy="830997"/>
+            <a:off x="730118" y="2103351"/>
+            <a:ext cx="4541969" cy="707886"/>
           </a:xfrm>
           <a:prstGeom prst="rect">
             <a:avLst/>
@@ -6627,10 +5221,7 @@
               <a:buNone/>
             </a:pPr>
             <a:r>
-              <a:rPr lang="ru-RU" sz="2400" b="1" i="0" u="none" strike="noStrike" cap="none" dirty="0">
-                <a:solidFill>
-                  <a:schemeClr val="bg1"/>
-                </a:solidFill>
+              <a:rPr lang="ru-RU" sz="2000" b="1" i="0" u="none" strike="noStrike" cap="none" dirty="0">
                 <a:latin typeface="Comfortaa SemiBold" pitchFamily="2" charset="0"/>
                 <a:ea typeface="Pacifico"/>
                 <a:cs typeface="Pacifico"/>
@@ -6639,10 +5230,7 @@
               <a:t>Создание программного решени</a:t>
             </a:r>
             <a:r>
-              <a:rPr lang="ru-RU" sz="2400" b="1" dirty="0">
-                <a:solidFill>
-                  <a:schemeClr val="bg1"/>
-                </a:solidFill>
+              <a:rPr lang="ru-RU" sz="2000" b="1" dirty="0">
                 <a:latin typeface="Comfortaa SemiBold" pitchFamily="2" charset="0"/>
                 <a:ea typeface="Pacifico"/>
                 <a:cs typeface="Pacifico"/>
@@ -6650,10 +5238,7 @@
               </a:rPr>
               <a:t>я</a:t>
             </a:r>
-            <a:endParaRPr lang="ru-RU" sz="2400" b="1" i="0" u="none" strike="noStrike" cap="none" dirty="0">
-              <a:solidFill>
-                <a:schemeClr val="bg1"/>
-              </a:solidFill>
+            <a:endParaRPr lang="ru-RU" sz="2000" b="1" i="0" u="none" strike="noStrike" cap="none" dirty="0">
               <a:latin typeface="Comfortaa SemiBold" pitchFamily="2" charset="0"/>
               <a:ea typeface="Calibri"/>
               <a:cs typeface="Calibri"/>
@@ -6676,7 +5261,7 @@
         </p:nvSpPr>
         <p:spPr>
           <a:xfrm>
-            <a:off x="635598" y="3217020"/>
+            <a:off x="730118" y="3073466"/>
             <a:ext cx="4250727" cy="1631216"/>
           </a:xfrm>
           <a:prstGeom prst="rect">
@@ -6701,9 +5286,6 @@
             </a:pPr>
             <a:r>
               <a:rPr lang="ru-RU" sz="2000" dirty="0">
-                <a:solidFill>
-                  <a:schemeClr val="bg1"/>
-                </a:solidFill>
                 <a:latin typeface="Calibri"/>
                 <a:ea typeface="Calibri"/>
                 <a:cs typeface="Poppins"/>
@@ -6712,9 +5294,6 @@
               <a:t>для сотрудников администрации, которое будет обеспечивать упрощенную форму учета данных о студентах проживающих в общежитии и оборудовании</a:t>
             </a:r>
             <a:endParaRPr lang="ru-RU" sz="2000" b="0" i="0" u="none" strike="noStrike" cap="none" dirty="0">
-              <a:solidFill>
-                <a:schemeClr val="bg1"/>
-              </a:solidFill>
               <a:latin typeface="Calibri"/>
               <a:ea typeface="Calibri"/>
               <a:cs typeface="Calibri"/>
@@ -6804,62 +5383,6 @@
               </a:rPr>
               <a:t>3</a:t>
             </a:r>
-          </a:p>
-        </p:txBody>
-      </p:sp>
-      <p:sp>
-        <p:nvSpPr>
-          <p:cNvPr id="35" name="Прямоугольник: скругленные углы 34">
-            <a:extLst>
-              <a:ext uri="{FF2B5EF4-FFF2-40B4-BE49-F238E27FC236}">
-                <a16:creationId xmlns:a16="http://schemas.microsoft.com/office/drawing/2014/main" id="{B0166C61-C690-81AE-91B8-293C4A8C2B44}"/>
-              </a:ext>
-            </a:extLst>
-          </p:cNvPr>
-          <p:cNvSpPr/>
-          <p:nvPr/>
-        </p:nvSpPr>
-        <p:spPr>
-          <a:xfrm>
-            <a:off x="95250" y="90039"/>
-            <a:ext cx="11994356" cy="786262"/>
-          </a:xfrm>
-          <a:prstGeom prst="roundRect">
-            <a:avLst>
-              <a:gd name="adj" fmla="val 23264"/>
-            </a:avLst>
-          </a:prstGeom>
-          <a:solidFill>
-            <a:schemeClr val="bg1"/>
-          </a:solidFill>
-          <a:ln>
-            <a:solidFill>
-              <a:schemeClr val="bg1"/>
-            </a:solidFill>
-          </a:ln>
-        </p:spPr>
-        <p:style>
-          <a:lnRef idx="2">
-            <a:schemeClr val="accent1">
-              <a:shade val="15000"/>
-            </a:schemeClr>
-          </a:lnRef>
-          <a:fillRef idx="1">
-            <a:schemeClr val="accent1"/>
-          </a:fillRef>
-          <a:effectRef idx="0">
-            <a:schemeClr val="accent1"/>
-          </a:effectRef>
-          <a:fontRef idx="minor">
-            <a:schemeClr val="lt1"/>
-          </a:fontRef>
-        </p:style>
-        <p:txBody>
-          <a:bodyPr rtlCol="0" anchor="ctr"/>
-          <a:lstStyle/>
-          <a:p>
-            <a:pPr algn="ctr"/>
-            <a:endParaRPr lang="ru-RU" dirty="0"/>
           </a:p>
         </p:txBody>
       </p:sp>
@@ -7059,7 +5582,7 @@
 </p:sld>
 </file>
 
-<file path=ppt/slides/slide4.xml><?xml version="1.0" encoding="utf-8"?>
+<file path=ppt/slides/slide3.xml><?xml version="1.0" encoding="utf-8"?>
 <p:sld xmlns:a="http://schemas.openxmlformats.org/drawingml/2006/main" xmlns:r="http://schemas.openxmlformats.org/officeDocument/2006/relationships" xmlns:p="http://schemas.openxmlformats.org/presentationml/2006/main">
   <p:cSld>
     <p:bg>
@@ -9122,7 +7645,7 @@
 </p:sld>
 </file>
 
-<file path=ppt/slides/slide5.xml><?xml version="1.0" encoding="utf-8"?>
+<file path=ppt/slides/slide4.xml><?xml version="1.0" encoding="utf-8"?>
 <p:sld xmlns:a="http://schemas.openxmlformats.org/drawingml/2006/main" xmlns:r="http://schemas.openxmlformats.org/officeDocument/2006/relationships" xmlns:p="http://schemas.openxmlformats.org/presentationml/2006/main">
   <p:cSld>
     <p:bg>
@@ -9978,7 +8501,7 @@
 </p:sld>
 </file>
 
-<file path=ppt/slides/slide6.xml><?xml version="1.0" encoding="utf-8"?>
+<file path=ppt/slides/slide5.xml><?xml version="1.0" encoding="utf-8"?>
 <p:sld xmlns:a="http://schemas.openxmlformats.org/drawingml/2006/main" xmlns:r="http://schemas.openxmlformats.org/officeDocument/2006/relationships" xmlns:p="http://schemas.openxmlformats.org/presentationml/2006/main">
   <p:cSld>
     <p:bg>
@@ -11531,7 +10054,7 @@
 </p:sld>
 </file>
 
-<file path=ppt/slides/slide7.xml><?xml version="1.0" encoding="utf-8"?>
+<file path=ppt/slides/slide6.xml><?xml version="1.0" encoding="utf-8"?>
 <p:sld xmlns:a="http://schemas.openxmlformats.org/drawingml/2006/main" xmlns:r="http://schemas.openxmlformats.org/officeDocument/2006/relationships" xmlns:p="http://schemas.openxmlformats.org/presentationml/2006/main">
   <p:cSld>
     <p:bg>
@@ -12311,7 +10834,7 @@
 </p:sld>
 </file>
 
-<file path=ppt/slides/slide8.xml><?xml version="1.0" encoding="utf-8"?>
+<file path=ppt/slides/slide7.xml><?xml version="1.0" encoding="utf-8"?>
 <p:sld xmlns:a="http://schemas.openxmlformats.org/drawingml/2006/main" xmlns:r="http://schemas.openxmlformats.org/officeDocument/2006/relationships" xmlns:p="http://schemas.openxmlformats.org/presentationml/2006/main">
   <p:cSld>
     <p:bg>
@@ -13327,7 +11850,7 @@
 </p:sld>
 </file>
 
-<file path=ppt/slides/slide9.xml><?xml version="1.0" encoding="utf-8"?>
+<file path=ppt/slides/slide8.xml><?xml version="1.0" encoding="utf-8"?>
 <p:sld xmlns:a="http://schemas.openxmlformats.org/drawingml/2006/main" xmlns:r="http://schemas.openxmlformats.org/officeDocument/2006/relationships" xmlns:p="http://schemas.openxmlformats.org/presentationml/2006/main">
   <p:cSld>
     <p:bg>
@@ -13863,6 +12386,931 @@
     <p:extLst>
       <p:ext uri="{BB962C8B-B14F-4D97-AF65-F5344CB8AC3E}">
         <p14:creationId xmlns:p14="http://schemas.microsoft.com/office/powerpoint/2010/main" val="118902062"/>
+      </p:ext>
+    </p:extLst>
+  </p:cSld>
+  <p:clrMapOvr>
+    <a:masterClrMapping/>
+  </p:clrMapOvr>
+  <mc:AlternateContent xmlns:mc="http://schemas.openxmlformats.org/markup-compatibility/2006" xmlns:p159="http://schemas.microsoft.com/office/powerpoint/2015/09/main">
+    <mc:Choice Requires="p159">
+      <p:transition>
+        <p159:morph option="byObject"/>
+      </p:transition>
+    </mc:Choice>
+    <mc:Fallback xmlns="">
+      <p:transition>
+        <p:fade/>
+      </p:transition>
+    </mc:Fallback>
+  </mc:AlternateContent>
+</p:sld>
+</file>
+
+<file path=ppt/slides/slide9.xml><?xml version="1.0" encoding="utf-8"?>
+<p:sld xmlns:a="http://schemas.openxmlformats.org/drawingml/2006/main" xmlns:r="http://schemas.openxmlformats.org/officeDocument/2006/relationships" xmlns:p="http://schemas.openxmlformats.org/presentationml/2006/main">
+  <p:cSld>
+    <p:spTree>
+      <p:nvGrpSpPr>
+        <p:cNvPr id="1" name="">
+          <a:extLst>
+            <a:ext uri="{FF2B5EF4-FFF2-40B4-BE49-F238E27FC236}">
+              <a16:creationId xmlns:a16="http://schemas.microsoft.com/office/drawing/2014/main" id="{A4EC15F9-04DA-7AA9-40B8-F5AF039BBD47}"/>
+            </a:ext>
+          </a:extLst>
+        </p:cNvPr>
+        <p:cNvGrpSpPr/>
+        <p:nvPr/>
+      </p:nvGrpSpPr>
+      <p:grpSpPr>
+        <a:xfrm>
+          <a:off x="0" y="0"/>
+          <a:ext cx="0" cy="0"/>
+          <a:chOff x="0" y="0"/>
+          <a:chExt cx="0" cy="0"/>
+        </a:xfrm>
+      </p:grpSpPr>
+      <p:sp>
+        <p:nvSpPr>
+          <p:cNvPr id="51" name="Овал 50">
+            <a:extLst>
+              <a:ext uri="{FF2B5EF4-FFF2-40B4-BE49-F238E27FC236}">
+                <a16:creationId xmlns:a16="http://schemas.microsoft.com/office/drawing/2014/main" id="{3657231C-99A4-CD2F-1053-A114A2D139D1}"/>
+              </a:ext>
+            </a:extLst>
+          </p:cNvPr>
+          <p:cNvSpPr/>
+          <p:nvPr/>
+        </p:nvSpPr>
+        <p:spPr>
+          <a:xfrm>
+            <a:off x="8023370" y="3286998"/>
+            <a:ext cx="5481380" cy="5481380"/>
+          </a:xfrm>
+          <a:prstGeom prst="ellipse">
+            <a:avLst/>
+          </a:prstGeom>
+          <a:solidFill>
+            <a:srgbClr val="F7941D"/>
+          </a:solidFill>
+          <a:ln>
+            <a:noFill/>
+          </a:ln>
+        </p:spPr>
+        <p:style>
+          <a:lnRef idx="2">
+            <a:schemeClr val="accent1">
+              <a:shade val="15000"/>
+            </a:schemeClr>
+          </a:lnRef>
+          <a:fillRef idx="1">
+            <a:schemeClr val="accent1"/>
+          </a:fillRef>
+          <a:effectRef idx="0">
+            <a:schemeClr val="accent1"/>
+          </a:effectRef>
+          <a:fontRef idx="minor">
+            <a:schemeClr val="lt1"/>
+          </a:fontRef>
+        </p:style>
+        <p:txBody>
+          <a:bodyPr rtlCol="0" anchor="ctr"/>
+          <a:lstStyle/>
+          <a:p>
+            <a:pPr algn="ctr"/>
+            <a:endParaRPr lang="ru-RU"/>
+          </a:p>
+        </p:txBody>
+      </p:sp>
+      <p:sp>
+        <p:nvSpPr>
+          <p:cNvPr id="49" name="Овал 48">
+            <a:extLst>
+              <a:ext uri="{FF2B5EF4-FFF2-40B4-BE49-F238E27FC236}">
+                <a16:creationId xmlns:a16="http://schemas.microsoft.com/office/drawing/2014/main" id="{3FC8E893-BCA3-EAE2-CC2C-57EE8E85538B}"/>
+              </a:ext>
+            </a:extLst>
+          </p:cNvPr>
+          <p:cNvSpPr/>
+          <p:nvPr/>
+        </p:nvSpPr>
+        <p:spPr>
+          <a:xfrm>
+            <a:off x="-4296229" y="-3556000"/>
+            <a:ext cx="8076071" cy="7985662"/>
+          </a:xfrm>
+          <a:prstGeom prst="ellipse">
+            <a:avLst/>
+          </a:prstGeom>
+          <a:solidFill>
+            <a:srgbClr val="F7941D"/>
+          </a:solidFill>
+          <a:ln>
+            <a:noFill/>
+          </a:ln>
+        </p:spPr>
+        <p:style>
+          <a:lnRef idx="2">
+            <a:schemeClr val="accent1">
+              <a:shade val="15000"/>
+            </a:schemeClr>
+          </a:lnRef>
+          <a:fillRef idx="1">
+            <a:schemeClr val="accent1"/>
+          </a:fillRef>
+          <a:effectRef idx="0">
+            <a:schemeClr val="accent1"/>
+          </a:effectRef>
+          <a:fontRef idx="minor">
+            <a:schemeClr val="lt1"/>
+          </a:fontRef>
+        </p:style>
+        <p:txBody>
+          <a:bodyPr rtlCol="0" anchor="ctr"/>
+          <a:lstStyle/>
+          <a:p>
+            <a:pPr algn="ctr"/>
+            <a:endParaRPr lang="ru-RU"/>
+          </a:p>
+        </p:txBody>
+      </p:sp>
+      <p:sp>
+        <p:nvSpPr>
+          <p:cNvPr id="2" name="Заголовок 1">
+            <a:extLst>
+              <a:ext uri="{FF2B5EF4-FFF2-40B4-BE49-F238E27FC236}">
+                <a16:creationId xmlns:a16="http://schemas.microsoft.com/office/drawing/2014/main" id="{8002C319-610B-71F4-32B0-DF226B7D41A9}"/>
+              </a:ext>
+            </a:extLst>
+          </p:cNvPr>
+          <p:cNvSpPr>
+            <a:spLocks noGrp="1"/>
+          </p:cNvSpPr>
+          <p:nvPr>
+            <p:ph type="ctrTitle"/>
+          </p:nvPr>
+        </p:nvSpPr>
+        <p:spPr>
+          <a:xfrm>
+            <a:off x="3779842" y="0"/>
+            <a:ext cx="8412158" cy="1789967"/>
+          </a:xfrm>
+        </p:spPr>
+        <p:txBody>
+          <a:bodyPr>
+            <a:noAutofit/>
+          </a:bodyPr>
+          <a:lstStyle/>
+          <a:p>
+            <a:r>
+              <a:rPr lang="ru-RU" sz="1400" dirty="0">
+                <a:latin typeface="Comfortaa Medium" pitchFamily="2" charset="0"/>
+              </a:rPr>
+              <a:t>ФЕДЕРАЛЬНОЕ ГОСУДАРСТВЕННОЕ БЮДЖЕТНОЕ ОБРАЗОВАТЕЛЬНОЕ</a:t>
+            </a:r>
+            <a:br>
+              <a:rPr lang="ru-RU" sz="1400" dirty="0">
+                <a:latin typeface="Comfortaa Medium" pitchFamily="2" charset="0"/>
+              </a:rPr>
+            </a:br>
+            <a:r>
+              <a:rPr lang="ru-RU" sz="1400" dirty="0">
+                <a:latin typeface="Comfortaa Medium" pitchFamily="2" charset="0"/>
+              </a:rPr>
+              <a:t>УЧРЕЖДЕНИЕ ВЫСШЕГО ОБРАЗОВАНИЯ</a:t>
+            </a:r>
+            <a:br>
+              <a:rPr lang="ru-RU" sz="1400" dirty="0">
+                <a:latin typeface="Comfortaa Medium" pitchFamily="2" charset="0"/>
+              </a:rPr>
+            </a:br>
+            <a:r>
+              <a:rPr lang="ru-RU" sz="1400" dirty="0">
+                <a:latin typeface="Comfortaa Medium" pitchFamily="2" charset="0"/>
+              </a:rPr>
+              <a:t>«САНКТ-ПЕТЕРБУРГСКИЙ ГОСУДАРСТВЕННЫЙ УНИВЕРСИТЕТ</a:t>
+            </a:r>
+            <a:br>
+              <a:rPr lang="ru-RU" sz="1400" dirty="0">
+                <a:latin typeface="Comfortaa Medium" pitchFamily="2" charset="0"/>
+              </a:rPr>
+            </a:br>
+            <a:r>
+              <a:rPr lang="ru-RU" sz="1400" dirty="0">
+                <a:latin typeface="Comfortaa Medium" pitchFamily="2" charset="0"/>
+              </a:rPr>
+              <a:t>ТЕЛЕКОММУНИКАЦИЙ ИМ. ПРОФ. М.А. БОНЧ-БРУЕВИЧА»</a:t>
+            </a:r>
+            <a:br>
+              <a:rPr lang="ru-RU" sz="1400" dirty="0">
+                <a:latin typeface="Comfortaa Medium" pitchFamily="2" charset="0"/>
+              </a:rPr>
+            </a:br>
+            <a:r>
+              <a:rPr lang="ru-RU" sz="1400" dirty="0">
+                <a:latin typeface="Comfortaa Medium" pitchFamily="2" charset="0"/>
+              </a:rPr>
+              <a:t>(СПбГУТ)</a:t>
+            </a:r>
+            <a:br>
+              <a:rPr lang="ru-RU" sz="1400" dirty="0">
+                <a:latin typeface="Comfortaa Medium" pitchFamily="2" charset="0"/>
+              </a:rPr>
+            </a:br>
+            <a:r>
+              <a:rPr lang="ru-RU" sz="1400" dirty="0">
+                <a:latin typeface="Comfortaa Medium" pitchFamily="2" charset="0"/>
+              </a:rPr>
+              <a:t>АРХАНГЕЛЬСКИЙ КОЛЛЕДЖ ТЕЛЕКОММУНИКАЦИЙ</a:t>
+            </a:r>
+            <a:br>
+              <a:rPr lang="ru-RU" sz="1400" dirty="0">
+                <a:latin typeface="Comfortaa Medium" pitchFamily="2" charset="0"/>
+              </a:rPr>
+            </a:br>
+            <a:r>
+              <a:rPr lang="ru-RU" sz="1400" dirty="0">
+                <a:latin typeface="Comfortaa Medium" pitchFamily="2" charset="0"/>
+              </a:rPr>
+              <a:t>ИМ. Б.Л. РОЗИНГА (ФИЛИАЛ) СПбГУТ</a:t>
+            </a:r>
+            <a:br>
+              <a:rPr lang="ru-RU" sz="1400" dirty="0">
+                <a:latin typeface="Comfortaa Medium" pitchFamily="2" charset="0"/>
+              </a:rPr>
+            </a:br>
+            <a:r>
+              <a:rPr lang="ru-RU" sz="1400" dirty="0">
+                <a:latin typeface="Comfortaa Medium" pitchFamily="2" charset="0"/>
+              </a:rPr>
+              <a:t>(АКТ (ф) СПбГУТ)</a:t>
+            </a:r>
+          </a:p>
+        </p:txBody>
+      </p:sp>
+      <p:sp>
+        <p:nvSpPr>
+          <p:cNvPr id="7" name="TextBox 6">
+            <a:extLst>
+              <a:ext uri="{FF2B5EF4-FFF2-40B4-BE49-F238E27FC236}">
+                <a16:creationId xmlns:a16="http://schemas.microsoft.com/office/drawing/2014/main" id="{A5C208D1-2947-A127-4EBF-DEDC8F85DFCD}"/>
+              </a:ext>
+            </a:extLst>
+          </p:cNvPr>
+          <p:cNvSpPr txBox="1"/>
+          <p:nvPr/>
+        </p:nvSpPr>
+        <p:spPr>
+          <a:xfrm>
+            <a:off x="161921" y="6254515"/>
+            <a:ext cx="11814238" cy="369332"/>
+          </a:xfrm>
+          <a:prstGeom prst="rect">
+            <a:avLst/>
+          </a:prstGeom>
+          <a:noFill/>
+          <a:ln>
+            <a:noFill/>
+          </a:ln>
+        </p:spPr>
+        <p:txBody>
+          <a:bodyPr wrap="square">
+            <a:spAutoFit/>
+          </a:bodyPr>
+          <a:lstStyle/>
+          <a:p>
+            <a:pPr algn="ctr"/>
+            <a:r>
+              <a:rPr lang="ru-RU" dirty="0">
+                <a:solidFill>
+                  <a:srgbClr val="0A0A0A"/>
+                </a:solidFill>
+                <a:latin typeface="Comfortaa Medium" pitchFamily="2" charset="0"/>
+              </a:rPr>
+              <a:t>Архангельск 2026</a:t>
+            </a:r>
+          </a:p>
+        </p:txBody>
+      </p:sp>
+      <p:grpSp>
+        <p:nvGrpSpPr>
+          <p:cNvPr id="45" name="Группа 44">
+            <a:extLst>
+              <a:ext uri="{FF2B5EF4-FFF2-40B4-BE49-F238E27FC236}">
+                <a16:creationId xmlns:a16="http://schemas.microsoft.com/office/drawing/2014/main" id="{A5978C2F-E68C-75D7-79E1-DB6CBEA60990}"/>
+              </a:ext>
+            </a:extLst>
+          </p:cNvPr>
+          <p:cNvGrpSpPr/>
+          <p:nvPr/>
+        </p:nvGrpSpPr>
+        <p:grpSpPr>
+          <a:xfrm>
+            <a:off x="396683" y="4447382"/>
+            <a:ext cx="7445845" cy="646331"/>
+            <a:chOff x="302493" y="3951615"/>
+            <a:chExt cx="7445845" cy="646331"/>
+          </a:xfrm>
+        </p:grpSpPr>
+        <p:sp>
+          <p:nvSpPr>
+            <p:cNvPr id="5" name="TextBox 4">
+              <a:extLst>
+                <a:ext uri="{FF2B5EF4-FFF2-40B4-BE49-F238E27FC236}">
+                  <a16:creationId xmlns:a16="http://schemas.microsoft.com/office/drawing/2014/main" id="{18960DBF-4B2A-AB94-468C-F0A4F01B0840}"/>
+                </a:ext>
+              </a:extLst>
+            </p:cNvPr>
+            <p:cNvSpPr txBox="1"/>
+            <p:nvPr/>
+          </p:nvSpPr>
+          <p:spPr>
+            <a:xfrm>
+              <a:off x="1057275" y="3951615"/>
+              <a:ext cx="6691063" cy="646331"/>
+            </a:xfrm>
+            <a:prstGeom prst="rect">
+              <a:avLst/>
+            </a:prstGeom>
+            <a:noFill/>
+          </p:spPr>
+          <p:txBody>
+            <a:bodyPr wrap="square">
+              <a:spAutoFit/>
+            </a:bodyPr>
+            <a:lstStyle/>
+            <a:p>
+              <a:r>
+                <a:rPr lang="ru-RU" dirty="0">
+                  <a:latin typeface="Comfortaa Medium" pitchFamily="2" charset="0"/>
+                </a:rPr>
+                <a:t>Екимов Вячеслав Андреевич</a:t>
+              </a:r>
+            </a:p>
+            <a:p>
+              <a:r>
+                <a:rPr lang="ru-RU" dirty="0">
+                  <a:solidFill>
+                    <a:schemeClr val="tx1">
+                      <a:lumMod val="50000"/>
+                      <a:lumOff val="50000"/>
+                    </a:schemeClr>
+                  </a:solidFill>
+                  <a:latin typeface="Comfortaa Medium" pitchFamily="2" charset="0"/>
+                </a:rPr>
+                <a:t>Дипломник</a:t>
+              </a:r>
+              <a:endParaRPr lang="en-US" dirty="0">
+                <a:latin typeface="Comfortaa Medium" pitchFamily="2" charset="0"/>
+              </a:endParaRPr>
+            </a:p>
+          </p:txBody>
+        </p:sp>
+        <p:grpSp>
+          <p:nvGrpSpPr>
+            <p:cNvPr id="33" name="Группа 32">
+              <a:extLst>
+                <a:ext uri="{FF2B5EF4-FFF2-40B4-BE49-F238E27FC236}">
+                  <a16:creationId xmlns:a16="http://schemas.microsoft.com/office/drawing/2014/main" id="{D1C1B8DB-198F-FC10-8089-DC73E6124493}"/>
+                </a:ext>
+              </a:extLst>
+            </p:cNvPr>
+            <p:cNvGrpSpPr/>
+            <p:nvPr/>
+          </p:nvGrpSpPr>
+          <p:grpSpPr>
+            <a:xfrm>
+              <a:off x="302493" y="3992823"/>
+              <a:ext cx="656149" cy="558787"/>
+              <a:chOff x="1169726" y="3999274"/>
+              <a:chExt cx="656149" cy="558787"/>
+            </a:xfrm>
+          </p:grpSpPr>
+          <p:sp>
+            <p:nvSpPr>
+              <p:cNvPr id="14" name="Овал 13">
+                <a:extLst>
+                  <a:ext uri="{FF2B5EF4-FFF2-40B4-BE49-F238E27FC236}">
+                    <a16:creationId xmlns:a16="http://schemas.microsoft.com/office/drawing/2014/main" id="{05F6C77E-B37B-30D1-E9DA-CF2C4944AD86}"/>
+                  </a:ext>
+                </a:extLst>
+              </p:cNvPr>
+              <p:cNvSpPr/>
+              <p:nvPr/>
+            </p:nvSpPr>
+            <p:spPr>
+              <a:xfrm>
+                <a:off x="1217679" y="3999274"/>
+                <a:ext cx="560244" cy="558787"/>
+              </a:xfrm>
+              <a:prstGeom prst="ellipse">
+                <a:avLst/>
+              </a:prstGeom>
+              <a:solidFill>
+                <a:srgbClr val="F7941D"/>
+              </a:solidFill>
+              <a:ln>
+                <a:solidFill>
+                  <a:srgbClr val="F7941D"/>
+                </a:solidFill>
+              </a:ln>
+            </p:spPr>
+            <p:style>
+              <a:lnRef idx="2">
+                <a:schemeClr val="accent1">
+                  <a:shade val="15000"/>
+                </a:schemeClr>
+              </a:lnRef>
+              <a:fillRef idx="1">
+                <a:schemeClr val="accent1"/>
+              </a:fillRef>
+              <a:effectRef idx="0">
+                <a:schemeClr val="accent1"/>
+              </a:effectRef>
+              <a:fontRef idx="minor">
+                <a:schemeClr val="lt1"/>
+              </a:fontRef>
+            </p:style>
+            <p:txBody>
+              <a:bodyPr rtlCol="0" anchor="ctr"/>
+              <a:lstStyle/>
+              <a:p>
+                <a:pPr algn="ctr"/>
+                <a:endParaRPr lang="ru-RU" sz="1400" dirty="0">
+                  <a:latin typeface="Bahnschrift" panose="020B0502040204020203" pitchFamily="34" charset="0"/>
+                </a:endParaRPr>
+              </a:p>
+            </p:txBody>
+          </p:sp>
+          <p:sp>
+            <p:nvSpPr>
+              <p:cNvPr id="16" name="TextBox 15">
+                <a:extLst>
+                  <a:ext uri="{FF2B5EF4-FFF2-40B4-BE49-F238E27FC236}">
+                    <a16:creationId xmlns:a16="http://schemas.microsoft.com/office/drawing/2014/main" id="{5E8E2CF0-36C3-010E-4D28-61C3ADE99048}"/>
+                  </a:ext>
+                </a:extLst>
+              </p:cNvPr>
+              <p:cNvSpPr txBox="1"/>
+              <p:nvPr/>
+            </p:nvSpPr>
+            <p:spPr>
+              <a:xfrm>
+                <a:off x="1169726" y="4114784"/>
+                <a:ext cx="656149" cy="338554"/>
+              </a:xfrm>
+              <a:prstGeom prst="rect">
+                <a:avLst/>
+              </a:prstGeom>
+              <a:noFill/>
+            </p:spPr>
+            <p:txBody>
+              <a:bodyPr wrap="square">
+                <a:spAutoFit/>
+              </a:bodyPr>
+              <a:lstStyle/>
+              <a:p>
+                <a:pPr algn="ctr"/>
+                <a:r>
+                  <a:rPr lang="ru-RU" sz="1600" dirty="0">
+                    <a:solidFill>
+                      <a:schemeClr val="bg1"/>
+                    </a:solidFill>
+                    <a:latin typeface="Comfortaa Medium" pitchFamily="2" charset="0"/>
+                  </a:rPr>
+                  <a:t>ЕВ</a:t>
+                </a:r>
+                <a:endParaRPr lang="ru-RU" dirty="0">
+                  <a:solidFill>
+                    <a:schemeClr val="bg1"/>
+                  </a:solidFill>
+                  <a:latin typeface="Comfortaa Medium" pitchFamily="2" charset="0"/>
+                </a:endParaRPr>
+              </a:p>
+            </p:txBody>
+          </p:sp>
+        </p:grpSp>
+      </p:grpSp>
+      <p:grpSp>
+        <p:nvGrpSpPr>
+          <p:cNvPr id="48" name="Группа 47">
+            <a:extLst>
+              <a:ext uri="{FF2B5EF4-FFF2-40B4-BE49-F238E27FC236}">
+                <a16:creationId xmlns:a16="http://schemas.microsoft.com/office/drawing/2014/main" id="{95B64847-3A44-67C4-E1F7-95D25C2D2316}"/>
+              </a:ext>
+            </a:extLst>
+          </p:cNvPr>
+          <p:cNvGrpSpPr/>
+          <p:nvPr/>
+        </p:nvGrpSpPr>
+        <p:grpSpPr>
+          <a:xfrm>
+            <a:off x="342763" y="5325049"/>
+            <a:ext cx="7499765" cy="646331"/>
+            <a:chOff x="248573" y="5125918"/>
+            <a:chExt cx="7499765" cy="646331"/>
+          </a:xfrm>
+        </p:grpSpPr>
+        <p:sp>
+          <p:nvSpPr>
+            <p:cNvPr id="36" name="TextBox 35">
+              <a:extLst>
+                <a:ext uri="{FF2B5EF4-FFF2-40B4-BE49-F238E27FC236}">
+                  <a16:creationId xmlns:a16="http://schemas.microsoft.com/office/drawing/2014/main" id="{CC3A6416-C8AA-015D-8344-87157EAC1501}"/>
+                </a:ext>
+              </a:extLst>
+            </p:cNvPr>
+            <p:cNvSpPr txBox="1"/>
+            <p:nvPr/>
+          </p:nvSpPr>
+          <p:spPr>
+            <a:xfrm>
+              <a:off x="1057276" y="5125918"/>
+              <a:ext cx="6691062" cy="646331"/>
+            </a:xfrm>
+            <a:prstGeom prst="rect">
+              <a:avLst/>
+            </a:prstGeom>
+            <a:noFill/>
+            <a:ln>
+              <a:noFill/>
+            </a:ln>
+          </p:spPr>
+          <p:txBody>
+            <a:bodyPr wrap="square">
+              <a:spAutoFit/>
+            </a:bodyPr>
+            <a:lstStyle/>
+            <a:p>
+              <a:r>
+                <a:rPr lang="ru-RU" dirty="0">
+                  <a:latin typeface="Comfortaa Medium" pitchFamily="2" charset="0"/>
+                </a:rPr>
+                <a:t>Маломан Юлия Сергеевна</a:t>
+              </a:r>
+            </a:p>
+            <a:p>
+              <a:r>
+                <a:rPr lang="ru-RU" dirty="0">
+                  <a:solidFill>
+                    <a:schemeClr val="tx1">
+                      <a:lumMod val="50000"/>
+                      <a:lumOff val="50000"/>
+                    </a:schemeClr>
+                  </a:solidFill>
+                  <a:latin typeface="Comfortaa Medium" pitchFamily="2" charset="0"/>
+                </a:rPr>
+                <a:t>Руководитель</a:t>
+              </a:r>
+              <a:endParaRPr lang="en-US" dirty="0">
+                <a:latin typeface="Comfortaa Medium" pitchFamily="2" charset="0"/>
+              </a:endParaRPr>
+            </a:p>
+          </p:txBody>
+        </p:sp>
+        <p:grpSp>
+          <p:nvGrpSpPr>
+            <p:cNvPr id="31" name="Группа 30">
+              <a:extLst>
+                <a:ext uri="{FF2B5EF4-FFF2-40B4-BE49-F238E27FC236}">
+                  <a16:creationId xmlns:a16="http://schemas.microsoft.com/office/drawing/2014/main" id="{76A8435F-D1C2-3A05-2291-98FB89E43EAE}"/>
+                </a:ext>
+              </a:extLst>
+            </p:cNvPr>
+            <p:cNvGrpSpPr/>
+            <p:nvPr/>
+          </p:nvGrpSpPr>
+          <p:grpSpPr>
+            <a:xfrm>
+              <a:off x="248573" y="5173577"/>
+              <a:ext cx="763987" cy="558787"/>
+              <a:chOff x="1115612" y="5161951"/>
+              <a:chExt cx="763987" cy="558787"/>
+            </a:xfrm>
+          </p:grpSpPr>
+          <p:sp>
+            <p:nvSpPr>
+              <p:cNvPr id="38" name="Овал 37">
+                <a:extLst>
+                  <a:ext uri="{FF2B5EF4-FFF2-40B4-BE49-F238E27FC236}">
+                    <a16:creationId xmlns:a16="http://schemas.microsoft.com/office/drawing/2014/main" id="{959749E5-65FE-9828-D6F5-00E43D7A62FE}"/>
+                  </a:ext>
+                </a:extLst>
+              </p:cNvPr>
+              <p:cNvSpPr/>
+              <p:nvPr/>
+            </p:nvSpPr>
+            <p:spPr>
+              <a:xfrm>
+                <a:off x="1217221" y="5161951"/>
+                <a:ext cx="560244" cy="558787"/>
+              </a:xfrm>
+              <a:prstGeom prst="ellipse">
+                <a:avLst/>
+              </a:prstGeom>
+              <a:solidFill>
+                <a:srgbClr val="F7941D"/>
+              </a:solidFill>
+              <a:ln>
+                <a:solidFill>
+                  <a:srgbClr val="F7941D"/>
+                </a:solidFill>
+              </a:ln>
+            </p:spPr>
+            <p:style>
+              <a:lnRef idx="2">
+                <a:schemeClr val="accent1">
+                  <a:shade val="15000"/>
+                </a:schemeClr>
+              </a:lnRef>
+              <a:fillRef idx="1">
+                <a:schemeClr val="accent1"/>
+              </a:fillRef>
+              <a:effectRef idx="0">
+                <a:schemeClr val="accent1"/>
+              </a:effectRef>
+              <a:fontRef idx="minor">
+                <a:schemeClr val="lt1"/>
+              </a:fontRef>
+            </p:style>
+            <p:txBody>
+              <a:bodyPr rtlCol="0" anchor="ctr"/>
+              <a:lstStyle/>
+              <a:p>
+                <a:pPr algn="ctr"/>
+                <a:endParaRPr lang="ru-RU" sz="1400" dirty="0">
+                  <a:latin typeface="Bahnschrift" panose="020B0502040204020203" pitchFamily="34" charset="0"/>
+                </a:endParaRPr>
+              </a:p>
+            </p:txBody>
+          </p:sp>
+          <p:sp>
+            <p:nvSpPr>
+              <p:cNvPr id="40" name="TextBox 39">
+                <a:extLst>
+                  <a:ext uri="{FF2B5EF4-FFF2-40B4-BE49-F238E27FC236}">
+                    <a16:creationId xmlns:a16="http://schemas.microsoft.com/office/drawing/2014/main" id="{3151B95A-8AB6-8505-0C46-7B5DB2467330}"/>
+                  </a:ext>
+                </a:extLst>
+              </p:cNvPr>
+              <p:cNvSpPr txBox="1"/>
+              <p:nvPr/>
+            </p:nvSpPr>
+            <p:spPr>
+              <a:xfrm>
+                <a:off x="1115612" y="5279806"/>
+                <a:ext cx="763987" cy="338554"/>
+              </a:xfrm>
+              <a:prstGeom prst="rect">
+                <a:avLst/>
+              </a:prstGeom>
+              <a:noFill/>
+            </p:spPr>
+            <p:txBody>
+              <a:bodyPr wrap="square">
+                <a:spAutoFit/>
+              </a:bodyPr>
+              <a:lstStyle/>
+              <a:p>
+                <a:pPr algn="ctr"/>
+                <a:r>
+                  <a:rPr lang="ru-RU" sz="1600" dirty="0">
+                    <a:solidFill>
+                      <a:schemeClr val="bg1"/>
+                    </a:solidFill>
+                    <a:latin typeface="Comfortaa Medium" pitchFamily="2" charset="0"/>
+                  </a:rPr>
+                  <a:t>МЮ</a:t>
+                </a:r>
+              </a:p>
+            </p:txBody>
+          </p:sp>
+        </p:grpSp>
+      </p:grpSp>
+      <p:sp>
+        <p:nvSpPr>
+          <p:cNvPr id="29" name="Подзаголовок 2">
+            <a:extLst>
+              <a:ext uri="{FF2B5EF4-FFF2-40B4-BE49-F238E27FC236}">
+                <a16:creationId xmlns:a16="http://schemas.microsoft.com/office/drawing/2014/main" id="{83060E8C-A540-D81D-2473-C997F8ACFA48}"/>
+              </a:ext>
+            </a:extLst>
+          </p:cNvPr>
+          <p:cNvSpPr txBox="1">
+            <a:spLocks/>
+          </p:cNvSpPr>
+          <p:nvPr/>
+        </p:nvSpPr>
+        <p:spPr>
+          <a:xfrm>
+            <a:off x="342763" y="2203790"/>
+            <a:ext cx="11868159" cy="1789967"/>
+          </a:xfrm>
+          <a:prstGeom prst="rect">
+            <a:avLst/>
+          </a:prstGeom>
+        </p:spPr>
+        <p:txBody>
+          <a:bodyPr vert="horz" lIns="91440" tIns="45720" rIns="91440" bIns="45720" rtlCol="0" anchor="ctr">
+            <a:normAutofit/>
+          </a:bodyPr>
+          <a:lstStyle>
+            <a:lvl1pPr marL="0" indent="0" algn="ctr" defTabSz="914400" rtl="0" eaLnBrk="1" latinLnBrk="0" hangingPunct="1">
+              <a:lnSpc>
+                <a:spcPct val="90000"/>
+              </a:lnSpc>
+              <a:spcBef>
+                <a:spcPts val="1000"/>
+              </a:spcBef>
+              <a:buFont typeface="Arial" panose="020B0604020202020204" pitchFamily="34" charset="0"/>
+              <a:buNone/>
+              <a:defRPr sz="2400" kern="1200">
+                <a:solidFill>
+                  <a:schemeClr val="tx1"/>
+                </a:solidFill>
+                <a:latin typeface="+mn-lt"/>
+                <a:ea typeface="+mn-ea"/>
+                <a:cs typeface="+mn-cs"/>
+              </a:defRPr>
+            </a:lvl1pPr>
+            <a:lvl2pPr marL="457200" indent="0" algn="ctr" defTabSz="914400" rtl="0" eaLnBrk="1" latinLnBrk="0" hangingPunct="1">
+              <a:lnSpc>
+                <a:spcPct val="90000"/>
+              </a:lnSpc>
+              <a:spcBef>
+                <a:spcPts val="500"/>
+              </a:spcBef>
+              <a:buFont typeface="Arial" panose="020B0604020202020204" pitchFamily="34" charset="0"/>
+              <a:buNone/>
+              <a:defRPr sz="2000" kern="1200">
+                <a:solidFill>
+                  <a:schemeClr val="tx1"/>
+                </a:solidFill>
+                <a:latin typeface="+mn-lt"/>
+                <a:ea typeface="+mn-ea"/>
+                <a:cs typeface="+mn-cs"/>
+              </a:defRPr>
+            </a:lvl2pPr>
+            <a:lvl3pPr marL="914400" indent="0" algn="ctr" defTabSz="914400" rtl="0" eaLnBrk="1" latinLnBrk="0" hangingPunct="1">
+              <a:lnSpc>
+                <a:spcPct val="90000"/>
+              </a:lnSpc>
+              <a:spcBef>
+                <a:spcPts val="500"/>
+              </a:spcBef>
+              <a:buFont typeface="Arial" panose="020B0604020202020204" pitchFamily="34" charset="0"/>
+              <a:buNone/>
+              <a:defRPr sz="1800" kern="1200">
+                <a:solidFill>
+                  <a:schemeClr val="tx1"/>
+                </a:solidFill>
+                <a:latin typeface="+mn-lt"/>
+                <a:ea typeface="+mn-ea"/>
+                <a:cs typeface="+mn-cs"/>
+              </a:defRPr>
+            </a:lvl3pPr>
+            <a:lvl4pPr marL="1371600" indent="0" algn="ctr" defTabSz="914400" rtl="0" eaLnBrk="1" latinLnBrk="0" hangingPunct="1">
+              <a:lnSpc>
+                <a:spcPct val="90000"/>
+              </a:lnSpc>
+              <a:spcBef>
+                <a:spcPts val="500"/>
+              </a:spcBef>
+              <a:buFont typeface="Arial" panose="020B0604020202020204" pitchFamily="34" charset="0"/>
+              <a:buNone/>
+              <a:defRPr sz="1600" kern="1200">
+                <a:solidFill>
+                  <a:schemeClr val="tx1"/>
+                </a:solidFill>
+                <a:latin typeface="+mn-lt"/>
+                <a:ea typeface="+mn-ea"/>
+                <a:cs typeface="+mn-cs"/>
+              </a:defRPr>
+            </a:lvl4pPr>
+            <a:lvl5pPr marL="1828800" indent="0" algn="ctr" defTabSz="914400" rtl="0" eaLnBrk="1" latinLnBrk="0" hangingPunct="1">
+              <a:lnSpc>
+                <a:spcPct val="90000"/>
+              </a:lnSpc>
+              <a:spcBef>
+                <a:spcPts val="500"/>
+              </a:spcBef>
+              <a:buFont typeface="Arial" panose="020B0604020202020204" pitchFamily="34" charset="0"/>
+              <a:buNone/>
+              <a:defRPr sz="1600" kern="1200">
+                <a:solidFill>
+                  <a:schemeClr val="tx1"/>
+                </a:solidFill>
+                <a:latin typeface="+mn-lt"/>
+                <a:ea typeface="+mn-ea"/>
+                <a:cs typeface="+mn-cs"/>
+              </a:defRPr>
+            </a:lvl5pPr>
+            <a:lvl6pPr marL="2286000" indent="0" algn="ctr" defTabSz="914400" rtl="0" eaLnBrk="1" latinLnBrk="0" hangingPunct="1">
+              <a:lnSpc>
+                <a:spcPct val="90000"/>
+              </a:lnSpc>
+              <a:spcBef>
+                <a:spcPts val="500"/>
+              </a:spcBef>
+              <a:buFont typeface="Arial" panose="020B0604020202020204" pitchFamily="34" charset="0"/>
+              <a:buNone/>
+              <a:defRPr sz="1600" kern="1200">
+                <a:solidFill>
+                  <a:schemeClr val="tx1"/>
+                </a:solidFill>
+                <a:latin typeface="+mn-lt"/>
+                <a:ea typeface="+mn-ea"/>
+                <a:cs typeface="+mn-cs"/>
+              </a:defRPr>
+            </a:lvl6pPr>
+            <a:lvl7pPr marL="2743200" indent="0" algn="ctr" defTabSz="914400" rtl="0" eaLnBrk="1" latinLnBrk="0" hangingPunct="1">
+              <a:lnSpc>
+                <a:spcPct val="90000"/>
+              </a:lnSpc>
+              <a:spcBef>
+                <a:spcPts val="500"/>
+              </a:spcBef>
+              <a:buFont typeface="Arial" panose="020B0604020202020204" pitchFamily="34" charset="0"/>
+              <a:buNone/>
+              <a:defRPr sz="1600" kern="1200">
+                <a:solidFill>
+                  <a:schemeClr val="tx1"/>
+                </a:solidFill>
+                <a:latin typeface="+mn-lt"/>
+                <a:ea typeface="+mn-ea"/>
+                <a:cs typeface="+mn-cs"/>
+              </a:defRPr>
+            </a:lvl7pPr>
+            <a:lvl8pPr marL="3200400" indent="0" algn="ctr" defTabSz="914400" rtl="0" eaLnBrk="1" latinLnBrk="0" hangingPunct="1">
+              <a:lnSpc>
+                <a:spcPct val="90000"/>
+              </a:lnSpc>
+              <a:spcBef>
+                <a:spcPts val="500"/>
+              </a:spcBef>
+              <a:buFont typeface="Arial" panose="020B0604020202020204" pitchFamily="34" charset="0"/>
+              <a:buNone/>
+              <a:defRPr sz="1600" kern="1200">
+                <a:solidFill>
+                  <a:schemeClr val="tx1"/>
+                </a:solidFill>
+                <a:latin typeface="+mn-lt"/>
+                <a:ea typeface="+mn-ea"/>
+                <a:cs typeface="+mn-cs"/>
+              </a:defRPr>
+            </a:lvl8pPr>
+            <a:lvl9pPr marL="3657600" indent="0" algn="ctr" defTabSz="914400" rtl="0" eaLnBrk="1" latinLnBrk="0" hangingPunct="1">
+              <a:lnSpc>
+                <a:spcPct val="90000"/>
+              </a:lnSpc>
+              <a:spcBef>
+                <a:spcPts val="500"/>
+              </a:spcBef>
+              <a:buFont typeface="Arial" panose="020B0604020202020204" pitchFamily="34" charset="0"/>
+              <a:buNone/>
+              <a:defRPr sz="1600" kern="1200">
+                <a:solidFill>
+                  <a:schemeClr val="tx1"/>
+                </a:solidFill>
+                <a:latin typeface="+mn-lt"/>
+                <a:ea typeface="+mn-ea"/>
+                <a:cs typeface="+mn-cs"/>
+              </a:defRPr>
+            </a:lvl9pPr>
+          </a:lstStyle>
+          <a:p>
+            <a:pPr algn="l"/>
+            <a:r>
+              <a:rPr lang="ru-RU" sz="5200" dirty="0">
+                <a:latin typeface="Comfortaa Medium" pitchFamily="2" charset="0"/>
+              </a:rPr>
+              <a:t>ДИПЛОМНЫЙ ПРОЕКТ</a:t>
+            </a:r>
+          </a:p>
+          <a:p>
+            <a:pPr algn="l"/>
+            <a:r>
+              <a:rPr lang="ru-RU" sz="2600" dirty="0">
+                <a:latin typeface="Comfortaa Medium" pitchFamily="2" charset="0"/>
+              </a:rPr>
+              <a:t>РАЗРАБОТКА ИНФОРМАЦИОННЫЙ СИСТЕМЫ </a:t>
+            </a:r>
+          </a:p>
+          <a:p>
+            <a:pPr algn="l"/>
+            <a:r>
+              <a:rPr lang="ru-RU" sz="2600" dirty="0">
+                <a:latin typeface="Comfortaa Medium" pitchFamily="2" charset="0"/>
+              </a:rPr>
+              <a:t>УЧЕТА НОМЕРНОГО ФОНДА ОБЩЕЖИТИЯ</a:t>
+            </a:r>
+          </a:p>
+        </p:txBody>
+      </p:sp>
+    </p:spTree>
+    <p:extLst>
+      <p:ext uri="{BB962C8B-B14F-4D97-AF65-F5344CB8AC3E}">
+        <p14:creationId xmlns:p14="http://schemas.microsoft.com/office/powerpoint/2010/main" val="1386530283"/>
       </p:ext>
     </p:extLst>
   </p:cSld>

--- a/ДП/Презентация/Презентация.pptx
+++ b/ДП/Презентация/Презентация.pptx
@@ -230,7 +230,7 @@
           <a:p>
             <a:fld id="{F3A30F77-5712-483B-AA1A-1F3B9FE8DBCC}" type="datetimeFigureOut">
               <a:rPr lang="ru-RU" smtClean="0"/>
-              <a:t>22.05.2026</a:t>
+              <a:t>10.06.2026</a:t>
             </a:fld>
             <a:endParaRPr lang="ru-RU"/>
           </a:p>
@@ -558,7 +558,31 @@
                 <a:ea typeface="+mn-ea"/>
                 <a:cs typeface="+mn-cs"/>
               </a:rPr>
-              <a:t>Уважаемая комиссия, добрый день. Я Екимов Вячеслав Андреевич, группа ИСПП-21. Тема проекта: «Разработка информационной системы учета номерного фонда общежития».</a:t>
+              <a:t>Уважаемая комиссия, добрый день. Я Екимов Вячеслав Андреевич. Я представляю вам дипломный проект на тему: «Разработка информационной системы учета номе </a:t>
+            </a:r>
+            <a:r>
+              <a:rPr lang="ru-RU" sz="1200" kern="1200" dirty="0" err="1">
+                <a:solidFill>
+                  <a:schemeClr val="tx1"/>
+                </a:solidFill>
+                <a:effectLst/>
+                <a:latin typeface="+mn-lt"/>
+                <a:ea typeface="+mn-ea"/>
+                <a:cs typeface="+mn-cs"/>
+              </a:rPr>
+              <a:t>рного</a:t>
+            </a:r>
+            <a:r>
+              <a:rPr lang="ru-RU" sz="1200" kern="1200" dirty="0">
+                <a:solidFill>
+                  <a:schemeClr val="tx1"/>
+                </a:solidFill>
+                <a:effectLst/>
+                <a:latin typeface="+mn-lt"/>
+                <a:ea typeface="+mn-ea"/>
+                <a:cs typeface="+mn-cs"/>
+              </a:rPr>
+              <a:t> фонда общежития».</a:t>
             </a:r>
             <a:endParaRPr lang="ru-RU" dirty="0"/>
           </a:p>
@@ -1049,7 +1073,7 @@
                 <a:ea typeface="+mn-ea"/>
                 <a:cs typeface="+mn-cs"/>
               </a:rPr>
-              <a:t>Разработка системы УНФО высоко актуальна и необходима, поскольку замена бумажного учёта на единое цифровое решение позволит автоматизировать повседневные задачи сотрудников колледжа, комендантов и воспитателей, исключить ошибки человеческого фактора и обеспечить мгновенный доступ к актуальным данным для оперативного и прозрачного управления структурой студенческого общежития.</a:t>
+              <a:t>Разработка системы УНФО высоко актуальна и необходима, поскольку замена бумажного учёта на единое цифровое решение позволит автоматизировать повседневные задачи сотрудников колледжа, комендантов и воспитателей, исключить ошибки человеческого фактора и обеспечить быстрый доступ к актуальным данным для оперативного и прозрачного управления номерным фондом студенческого общежития.</a:t>
             </a:r>
           </a:p>
         </p:txBody>
@@ -1171,7 +1195,31 @@
                 <a:ea typeface="+mn-ea"/>
                 <a:cs typeface="+mn-cs"/>
               </a:rPr>
-              <a:t>Основной целью проекта является создание системы для сотрудников колледжа и общежития, которое будет обеспечивать упрощенную форму учета данных о студентах, проживающих в общежитии и оборудовании в нем. Для достижения поставленной цели необходимо выполнить ряд задач, представленных на слайде.</a:t>
+              <a:t>Основной целью проекта является создание системы для сотрудников колледжа и общежития, которая будет обеспечивать упрощение учета данных о студентах, проживающих в общежитии, комнатах, мебели и постельном белье. Для достижения поставленной цели необходимо </a:t>
+            </a:r>
+            <a:r>
+              <a:rPr lang="ru-RU" sz="1200" b="1" kern="1200" dirty="0">
+                <a:solidFill>
+                  <a:schemeClr val="tx1"/>
+                </a:solidFill>
+                <a:effectLst/>
+                <a:latin typeface="+mn-lt"/>
+                <a:ea typeface="+mn-ea"/>
+                <a:cs typeface="+mn-cs"/>
+              </a:rPr>
+              <a:t>решить</a:t>
+            </a:r>
+            <a:r>
+              <a:rPr lang="ru-RU" sz="1200" kern="1200" dirty="0">
+                <a:solidFill>
+                  <a:schemeClr val="tx1"/>
+                </a:solidFill>
+                <a:effectLst/>
+                <a:latin typeface="+mn-lt"/>
+                <a:ea typeface="+mn-ea"/>
+                <a:cs typeface="+mn-cs"/>
+              </a:rPr>
+              <a:t> ряд задач, представленных на слайде.</a:t>
             </a:r>
             <a:endParaRPr lang="ru-RU" dirty="0"/>
           </a:p>
@@ -2037,7 +2085,7 @@
             <a:pPr defTabSz="964783"/>
             <a:r>
               <a:rPr lang="ru-RU" sz="1300" dirty="0"/>
-              <a:t>Среди преимуществ, представленных на слайде, хочется так же выделить то, что система разработана непосредственно для Архангельского колледжа телекоммуникаций и разработка велась под конкретные условия с целью улучшить и ускорить текущие процессы.</a:t>
+              <a:t>Помимо преимуществ, представленных на слайде, хочется так же выделить то, что система разработана непосредственно для Архангельского колледжа телекоммуникаций и разработка велась под конкретные условия с целью улучшить и ускорить текущие процессы.</a:t>
             </a:r>
           </a:p>
           <a:p>
@@ -2135,7 +2183,31 @@
                 <a:ea typeface="+mn-ea"/>
                 <a:cs typeface="+mn-cs"/>
               </a:rPr>
-              <a:t>Завершая презентацию, отмечу: развитие программного продукта - процесс постоянный, но текущая версия системы уже стабильна и полностью готова к первому этапу внедрения. Что сейчас будет продемонстрированно.</a:t>
+              <a:t>Завершая презентацию, отмечу: развитие программного продукта - процесс постоянный, но текущая версия системы уже стабильна и </a:t>
+            </a:r>
+            <a:r>
+              <a:rPr lang="ru-RU" sz="1200" kern="1200">
+                <a:solidFill>
+                  <a:schemeClr val="tx1"/>
+                </a:solidFill>
+                <a:effectLst/>
+                <a:latin typeface="+mn-lt"/>
+                <a:ea typeface="+mn-ea"/>
+                <a:cs typeface="+mn-cs"/>
+              </a:rPr>
+              <a:t>полностью готова. </a:t>
+            </a:r>
+            <a:r>
+              <a:rPr lang="ru-RU" sz="1200" kern="1200" dirty="0">
+                <a:solidFill>
+                  <a:schemeClr val="tx1"/>
+                </a:solidFill>
+                <a:effectLst/>
+                <a:latin typeface="+mn-lt"/>
+                <a:ea typeface="+mn-ea"/>
+                <a:cs typeface="+mn-cs"/>
+              </a:rPr>
+              <a:t>Что сейчас будет продемонстрированно.</a:t>
             </a:r>
           </a:p>
         </p:txBody>
@@ -2550,7 +2622,7 @@
           <a:p>
             <a:fld id="{D373FD95-13B8-4D9F-981D-7E2051AFE206}" type="datetimeFigureOut">
               <a:rPr lang="ru-RU" smtClean="0"/>
-              <a:t>22.05.2026</a:t>
+              <a:t>10.06.2026</a:t>
             </a:fld>
             <a:endParaRPr lang="ru-RU"/>
           </a:p>
@@ -2760,7 +2832,7 @@
           <a:p>
             <a:fld id="{D373FD95-13B8-4D9F-981D-7E2051AFE206}" type="datetimeFigureOut">
               <a:rPr lang="ru-RU" smtClean="0"/>
-              <a:t>22.05.2026</a:t>
+              <a:t>10.06.2026</a:t>
             </a:fld>
             <a:endParaRPr lang="ru-RU"/>
           </a:p>
@@ -2980,7 +3052,7 @@
           <a:p>
             <a:fld id="{D373FD95-13B8-4D9F-981D-7E2051AFE206}" type="datetimeFigureOut">
               <a:rPr lang="ru-RU" smtClean="0"/>
-              <a:t>22.05.2026</a:t>
+              <a:t>10.06.2026</a:t>
             </a:fld>
             <a:endParaRPr lang="ru-RU"/>
           </a:p>
@@ -3190,7 +3262,7 @@
           <a:p>
             <a:fld id="{D373FD95-13B8-4D9F-981D-7E2051AFE206}" type="datetimeFigureOut">
               <a:rPr lang="ru-RU" smtClean="0"/>
-              <a:t>22.05.2026</a:t>
+              <a:t>10.06.2026</a:t>
             </a:fld>
             <a:endParaRPr lang="ru-RU"/>
           </a:p>
@@ -3477,7 +3549,7 @@
           <a:p>
             <a:fld id="{D373FD95-13B8-4D9F-981D-7E2051AFE206}" type="datetimeFigureOut">
               <a:rPr lang="ru-RU" smtClean="0"/>
-              <a:t>22.05.2026</a:t>
+              <a:t>10.06.2026</a:t>
             </a:fld>
             <a:endParaRPr lang="ru-RU"/>
           </a:p>
@@ -3754,7 +3826,7 @@
           <a:p>
             <a:fld id="{D373FD95-13B8-4D9F-981D-7E2051AFE206}" type="datetimeFigureOut">
               <a:rPr lang="ru-RU" smtClean="0"/>
-              <a:t>22.05.2026</a:t>
+              <a:t>10.06.2026</a:t>
             </a:fld>
             <a:endParaRPr lang="ru-RU"/>
           </a:p>
@@ -4178,7 +4250,7 @@
           <a:p>
             <a:fld id="{D373FD95-13B8-4D9F-981D-7E2051AFE206}" type="datetimeFigureOut">
               <a:rPr lang="ru-RU" smtClean="0"/>
-              <a:t>22.05.2026</a:t>
+              <a:t>10.06.2026</a:t>
             </a:fld>
             <a:endParaRPr lang="ru-RU"/>
           </a:p>
@@ -4331,7 +4403,7 @@
           <a:p>
             <a:fld id="{D373FD95-13B8-4D9F-981D-7E2051AFE206}" type="datetimeFigureOut">
               <a:rPr lang="ru-RU" smtClean="0"/>
-              <a:t>22.05.2026</a:t>
+              <a:t>10.06.2026</a:t>
             </a:fld>
             <a:endParaRPr lang="ru-RU"/>
           </a:p>
@@ -4456,7 +4528,7 @@
           <a:p>
             <a:fld id="{D373FD95-13B8-4D9F-981D-7E2051AFE206}" type="datetimeFigureOut">
               <a:rPr lang="ru-RU" smtClean="0"/>
-              <a:t>22.05.2026</a:t>
+              <a:t>10.06.2026</a:t>
             </a:fld>
             <a:endParaRPr lang="ru-RU"/>
           </a:p>
@@ -4779,7 +4851,7 @@
           <a:p>
             <a:fld id="{D373FD95-13B8-4D9F-981D-7E2051AFE206}" type="datetimeFigureOut">
               <a:rPr lang="ru-RU" smtClean="0"/>
-              <a:t>22.05.2026</a:t>
+              <a:t>10.06.2026</a:t>
             </a:fld>
             <a:endParaRPr lang="ru-RU"/>
           </a:p>
@@ -5079,7 +5151,7 @@
           <a:p>
             <a:fld id="{D373FD95-13B8-4D9F-981D-7E2051AFE206}" type="datetimeFigureOut">
               <a:rPr lang="ru-RU" smtClean="0"/>
-              <a:t>22.05.2026</a:t>
+              <a:t>10.06.2026</a:t>
             </a:fld>
             <a:endParaRPr lang="ru-RU"/>
           </a:p>
@@ -5335,7 +5407,7 @@
           <a:p>
             <a:fld id="{D373FD95-13B8-4D9F-981D-7E2051AFE206}" type="datetimeFigureOut">
               <a:rPr lang="ru-RU" smtClean="0"/>
-              <a:t>22.05.2026</a:t>
+              <a:t>10.06.2026</a:t>
             </a:fld>
             <a:endParaRPr lang="ru-RU"/>
           </a:p>
@@ -11317,7 +11389,7 @@
                 <a:rPr lang="ru-RU" sz="2000" dirty="0">
                   <a:latin typeface="Comfortaa Medium" pitchFamily="2" charset="0"/>
                 </a:rPr>
-                <a:t>Отсутствие единой системы учета затрудняет управление фондом студенческих общежитий.</a:t>
+                <a:t>Отсутствие единой системы учета затрудняет управление фондом студенческих общежитий</a:t>
               </a:r>
               <a:endParaRPr lang="ru-RU" sz="2000" b="0" i="0" u="none" strike="noStrike" cap="none" dirty="0">
                 <a:solidFill>
@@ -12167,7 +12239,7 @@
                 <a:rPr lang="ru-RU" sz="3200" dirty="0">
                   <a:latin typeface="Comfortaa Medium" pitchFamily="2" charset="0"/>
                 </a:rPr>
-                <a:t>Актуальность и аудитория</a:t>
+                <a:t>Актуальность и пользователи системы</a:t>
               </a:r>
             </a:p>
           </p:txBody>
@@ -12930,8 +13002,8 @@
           </p:nvSpPr>
           <p:spPr>
             <a:xfrm>
-              <a:off x="6222652" y="1683197"/>
-              <a:ext cx="2453876" cy="369332"/>
+              <a:off x="6222652" y="1547390"/>
+              <a:ext cx="2453876" cy="646331"/>
             </a:xfrm>
             <a:prstGeom prst="rect">
               <a:avLst/>
@@ -12954,29 +13026,8 @@
                   <a:cs typeface="Poppins" panose="020B0604020202020204" charset="0"/>
                   <a:sym typeface="Pacifico"/>
                 </a:rPr>
-                <a:t>Разработка </a:t>
+                <a:t>Проектирование интерфейса</a:t>
               </a:r>
-              <a:r>
-                <a:rPr lang="en-US" dirty="0">
-                  <a:solidFill>
-                    <a:srgbClr val="0E0E0E"/>
-                  </a:solidFill>
-                  <a:latin typeface="Comfortaa Medium" pitchFamily="2" charset="0"/>
-                  <a:ea typeface="Pacifico"/>
-                  <a:cs typeface="Poppins" panose="020B0604020202020204" charset="0"/>
-                  <a:sym typeface="Pacifico"/>
-                </a:rPr>
-                <a:t>UI</a:t>
-              </a:r>
-              <a:endParaRPr lang="ru-RU" dirty="0">
-                <a:solidFill>
-                  <a:srgbClr val="0E0E0E"/>
-                </a:solidFill>
-                <a:latin typeface="Comfortaa Medium" pitchFamily="2" charset="0"/>
-                <a:ea typeface="Pacifico"/>
-                <a:cs typeface="Poppins" panose="020B0604020202020204" charset="0"/>
-                <a:sym typeface="Pacifico"/>
-              </a:endParaRPr>
             </a:p>
           </p:txBody>
         </p:sp>
@@ -14085,7 +14136,7 @@
             <p:spPr>
               <a:xfrm>
                 <a:off x="391886" y="1514499"/>
-                <a:ext cx="4748041" cy="1888146"/>
+                <a:ext cx="4748041" cy="2349810"/>
               </a:xfrm>
               <a:prstGeom prst="rect">
                 <a:avLst/>
@@ -14110,7 +14161,7 @@
                     <a:cs typeface="Pacifico"/>
                     <a:sym typeface="Pacifico"/>
                   </a:rPr>
-                  <a:t>Разработать веб-приложение</a:t>
+                  <a:t>Разработать информационную систему</a:t>
                 </a:r>
               </a:p>
               <a:p>
@@ -14148,7 +14199,7 @@
               </a:extLst>
             </p:cNvPr>
             <p:cNvPicPr>
-              <a:picLocks noGrp="1" noRot="1" noChangeAspect="1" noMove="1" noResize="1" noEditPoints="1" noAdjustHandles="1" noChangeArrowheads="1" noChangeShapeType="1" noCrop="1"/>
+              <a:picLocks noChangeAspect="1"/>
             </p:cNvPicPr>
             <p:nvPr/>
           </p:nvPicPr>
@@ -14167,7 +14218,7 @@
           </p:blipFill>
           <p:spPr bwMode="auto">
             <a:xfrm>
-              <a:off x="1504111" y="3686611"/>
+              <a:off x="1504111" y="4003482"/>
               <a:ext cx="2272208" cy="2272208"/>
             </a:xfrm>
             <a:prstGeom prst="rect">
@@ -14435,7 +14486,7 @@
           <p:spPr>
             <a:xfrm>
               <a:off x="95250" y="1304643"/>
-              <a:ext cx="5188810" cy="400110"/>
+              <a:ext cx="5188810" cy="312901"/>
             </a:xfrm>
             <a:prstGeom prst="rect">
               <a:avLst/>
@@ -14453,7 +14504,7 @@
                 <a:rPr lang="ru-RU" sz="2000" dirty="0">
                   <a:latin typeface="Comfortaa Medium" pitchFamily="2" charset="0"/>
                 </a:rPr>
-                <a:t>СЕРВЕР</a:t>
+                <a:t>РАЗВЕРТЫВАНИЕ</a:t>
               </a:r>
             </a:p>
           </p:txBody>
@@ -14801,7 +14852,7 @@
           <p:spPr>
             <a:xfrm>
               <a:off x="5508154" y="1304643"/>
-              <a:ext cx="6438575" cy="400110"/>
+              <a:ext cx="6438575" cy="312901"/>
             </a:xfrm>
             <a:prstGeom prst="rect">
               <a:avLst/>
@@ -14816,14 +14867,11 @@
             <a:p>
               <a:pPr algn="ctr"/>
               <a:r>
-                <a:rPr lang="en-US" sz="2000" dirty="0">
+                <a:rPr lang="ru-RU" sz="2000" dirty="0">
                   <a:latin typeface="Comfortaa Medium" pitchFamily="2" charset="0"/>
                 </a:rPr>
-                <a:t>API</a:t>
+                <a:t>СЕРВЕРНАЯ ЧАСТЬ</a:t>
               </a:r>
-              <a:endParaRPr lang="ru-RU" sz="2000" dirty="0">
-                <a:latin typeface="Comfortaa Medium" pitchFamily="2" charset="0"/>
-              </a:endParaRPr>
             </a:p>
           </p:txBody>
         </p:sp>
@@ -15172,7 +15220,7 @@
           <p:spPr>
             <a:xfrm>
               <a:off x="5508154" y="1304643"/>
-              <a:ext cx="6438575" cy="400110"/>
+              <a:ext cx="6438575" cy="312901"/>
             </a:xfrm>
             <a:prstGeom prst="rect">
               <a:avLst/>
@@ -15187,14 +15235,11 @@
             <a:p>
               <a:pPr algn="ctr"/>
               <a:r>
-                <a:rPr lang="en-US" sz="2000" dirty="0">
+                <a:rPr lang="ru-RU" sz="2000" dirty="0">
                   <a:latin typeface="Comfortaa Medium" pitchFamily="2" charset="0"/>
                 </a:rPr>
-                <a:t>FRONTEND</a:t>
+                <a:t>КЛИЕНТСКАЯ ЧАСТЬ</a:t>
               </a:r>
-              <a:endParaRPr lang="ru-RU" sz="2000" dirty="0">
-                <a:latin typeface="Comfortaa Medium" pitchFamily="2" charset="0"/>
-              </a:endParaRPr>
             </a:p>
           </p:txBody>
         </p:sp>
@@ -16212,7 +16257,7 @@
         </p:nvGrpSpPr>
         <p:grpSpPr>
           <a:xfrm>
-            <a:off x="226218" y="1733927"/>
+            <a:off x="3234824" y="1733926"/>
             <a:ext cx="2518287" cy="3732357"/>
             <a:chOff x="952500" y="1723424"/>
             <a:chExt cx="2518287" cy="3732357"/>
@@ -16309,7 +16354,7 @@
             <p:spPr>
               <a:xfrm>
                 <a:off x="1041394" y="4412577"/>
-                <a:ext cx="3156980" cy="646331"/>
+                <a:ext cx="3156980" cy="923330"/>
               </a:xfrm>
               <a:prstGeom prst="rect">
                 <a:avLst/>
@@ -16327,7 +16372,7 @@
                   <a:rPr lang="ru-RU" dirty="0">
                     <a:latin typeface="Comfortaa Medium" pitchFamily="2" charset="0"/>
                   </a:rPr>
-                  <a:t>Скорость работы с данным</a:t>
+                  <a:t>Скорость работы с данными</a:t>
                 </a:r>
               </a:p>
             </p:txBody>
@@ -16395,7 +16440,7 @@
         </p:nvGrpSpPr>
         <p:grpSpPr>
           <a:xfrm>
-            <a:off x="3234824" y="1733927"/>
+            <a:off x="226218" y="1733926"/>
             <a:ext cx="2668883" cy="3732357"/>
             <a:chOff x="3729944" y="1719321"/>
             <a:chExt cx="2668883" cy="3732357"/>
@@ -16492,7 +16537,7 @@
             <p:spPr>
               <a:xfrm>
                 <a:off x="1041394" y="4429331"/>
-                <a:ext cx="3156980" cy="646331"/>
+                <a:ext cx="3156980" cy="923330"/>
               </a:xfrm>
               <a:prstGeom prst="rect">
                 <a:avLst/>
@@ -16510,7 +16555,7 @@
                   <a:rPr lang="ru-RU" dirty="0">
                     <a:latin typeface="Comfortaa Medium" pitchFamily="2" charset="0"/>
                   </a:rPr>
-                  <a:t>Контроль над всей структурой</a:t>
+                  <a:t>Контроль номерного фонда общежития</a:t>
                 </a:r>
               </a:p>
             </p:txBody>
@@ -16578,7 +16623,7 @@
         </p:nvGrpSpPr>
         <p:grpSpPr>
           <a:xfrm>
-            <a:off x="6394026" y="1733927"/>
+            <a:off x="9417888" y="1733927"/>
             <a:ext cx="2544097" cy="3732357"/>
             <a:chOff x="6657984" y="1717270"/>
             <a:chExt cx="2544097" cy="3732357"/>
@@ -16675,7 +16720,7 @@
             <p:spPr>
               <a:xfrm>
                 <a:off x="1041394" y="4418731"/>
-                <a:ext cx="3124952" cy="646331"/>
+                <a:ext cx="3124952" cy="923330"/>
               </a:xfrm>
               <a:prstGeom prst="rect">
                 <a:avLst/>
@@ -16693,7 +16738,7 @@
                   <a:rPr lang="ru-RU" dirty="0">
                     <a:latin typeface="Comfortaa Medium" pitchFamily="2" charset="0"/>
                   </a:rPr>
-                  <a:t>Расширение системы</a:t>
+                  <a:t>Простота расширения системы</a:t>
                 </a:r>
               </a:p>
             </p:txBody>
@@ -16761,7 +16806,7 @@
         </p:nvGrpSpPr>
         <p:grpSpPr>
           <a:xfrm>
-            <a:off x="9428443" y="1733927"/>
+            <a:off x="6401654" y="1733926"/>
             <a:ext cx="2518287" cy="3732357"/>
             <a:chOff x="9461237" y="1721372"/>
             <a:chExt cx="2518287" cy="3732357"/>
@@ -16858,7 +16903,7 @@
             <p:spPr>
               <a:xfrm>
                 <a:off x="1041394" y="4418731"/>
-                <a:ext cx="3156980" cy="646331"/>
+                <a:ext cx="3156980" cy="923330"/>
               </a:xfrm>
               <a:prstGeom prst="rect">
                 <a:avLst/>
@@ -16876,7 +16921,7 @@
                   <a:rPr lang="ru-RU" dirty="0">
                     <a:latin typeface="Comfortaa Medium" pitchFamily="2" charset="0"/>
                   </a:rPr>
-                  <a:t>Использование не вставая со стула</a:t>
+                  <a:t>Удаленное получение информации</a:t>
                 </a:r>
               </a:p>
             </p:txBody>
@@ -17272,9 +17317,9 @@
         </p:nvGrpSpPr>
         <p:grpSpPr>
           <a:xfrm>
-            <a:off x="660400" y="1841122"/>
+            <a:off x="660400" y="1890127"/>
             <a:ext cx="4660150" cy="3175755"/>
-            <a:chOff x="2341062" y="2335789"/>
+            <a:chOff x="2341062" y="2358422"/>
             <a:chExt cx="3121184" cy="1466727"/>
           </a:xfrm>
         </p:grpSpPr>
@@ -17292,7 +17337,7 @@
           </p:nvSpPr>
           <p:spPr>
             <a:xfrm>
-              <a:off x="2341062" y="2335789"/>
+              <a:off x="2341062" y="2358422"/>
               <a:ext cx="3121184" cy="1466727"/>
             </a:xfrm>
             <a:prstGeom prst="roundRect">
@@ -17348,8 +17393,8 @@
           </p:nvSpPr>
           <p:spPr>
             <a:xfrm>
-              <a:off x="2341062" y="2781678"/>
-              <a:ext cx="2883160" cy="554374"/>
+              <a:off x="2460074" y="2558733"/>
+              <a:ext cx="2883160" cy="1066103"/>
             </a:xfrm>
             <a:prstGeom prst="rect">
               <a:avLst/>
@@ -17381,7 +17426,7 @@
                   <a:cs typeface="Poppins"/>
                   <a:sym typeface="Poppins"/>
                 </a:rPr>
-                <a:t>Поставленная цель достигнута, задачи выполнены </a:t>
+                <a:t>Разработана информационная система, решающая все поставленные задачи по учету номерного фонда</a:t>
               </a:r>
               <a:endParaRPr lang="ru-RU" sz="2400" b="0" i="0" u="none" strike="noStrike" cap="none" dirty="0">
                 <a:solidFill>
